--- a/src/plots/Plots_Design.pptx
+++ b/src/plots/Plots_Design.pptx
@@ -5,7 +5,7 @@
     <p:sldMasterId id="2147483648" r:id="rId1"/>
   </p:sldMasterIdLst>
   <p:notesMasterIdLst>
-    <p:notesMasterId r:id="rId11"/>
+    <p:notesMasterId r:id="rId12"/>
   </p:notesMasterIdLst>
   <p:sldIdLst>
     <p:sldId id="256" r:id="rId2"/>
@@ -17,6 +17,7 @@
     <p:sldId id="262" r:id="rId8"/>
     <p:sldId id="263" r:id="rId9"/>
     <p:sldId id="264" r:id="rId10"/>
+    <p:sldId id="265" r:id="rId11"/>
   </p:sldIdLst>
   <p:sldSz cx="12192000" cy="6858000"/>
   <p:notesSz cx="6858000" cy="9144000"/>
@@ -205,7 +206,7 @@
           <a:p>
             <a:fld id="{706903FD-3A5F-6842-A4B5-3D8FFB14CDE8}" type="datetimeFigureOut">
               <a:rPr lang="en-US" smtClean="0"/>
-              <a:t>3/19/26</a:t>
+              <a:t>8/4/26</a:t>
             </a:fld>
             <a:endParaRPr lang="en-US"/>
           </a:p>
@@ -871,7 +872,7 @@
           <a:p>
             <a:fld id="{64F5CC27-B0BF-C043-9BBB-3210B3BD3E8D}" type="datetimeFigureOut">
               <a:rPr lang="en-US" smtClean="0"/>
-              <a:t>3/19/26</a:t>
+              <a:t>8/4/26</a:t>
             </a:fld>
             <a:endParaRPr lang="en-US"/>
           </a:p>
@@ -1069,7 +1070,7 @@
           <a:p>
             <a:fld id="{64F5CC27-B0BF-C043-9BBB-3210B3BD3E8D}" type="datetimeFigureOut">
               <a:rPr lang="en-US" smtClean="0"/>
-              <a:t>3/19/26</a:t>
+              <a:t>8/4/26</a:t>
             </a:fld>
             <a:endParaRPr lang="en-US"/>
           </a:p>
@@ -1277,7 +1278,7 @@
           <a:p>
             <a:fld id="{64F5CC27-B0BF-C043-9BBB-3210B3BD3E8D}" type="datetimeFigureOut">
               <a:rPr lang="en-US" smtClean="0"/>
-              <a:t>3/19/26</a:t>
+              <a:t>8/4/26</a:t>
             </a:fld>
             <a:endParaRPr lang="en-US"/>
           </a:p>
@@ -1475,7 +1476,7 @@
           <a:p>
             <a:fld id="{64F5CC27-B0BF-C043-9BBB-3210B3BD3E8D}" type="datetimeFigureOut">
               <a:rPr lang="en-US" smtClean="0"/>
-              <a:t>3/19/26</a:t>
+              <a:t>8/4/26</a:t>
             </a:fld>
             <a:endParaRPr lang="en-US"/>
           </a:p>
@@ -1750,7 +1751,7 @@
           <a:p>
             <a:fld id="{64F5CC27-B0BF-C043-9BBB-3210B3BD3E8D}" type="datetimeFigureOut">
               <a:rPr lang="en-US" smtClean="0"/>
-              <a:t>3/19/26</a:t>
+              <a:t>8/4/26</a:t>
             </a:fld>
             <a:endParaRPr lang="en-US"/>
           </a:p>
@@ -2015,7 +2016,7 @@
           <a:p>
             <a:fld id="{64F5CC27-B0BF-C043-9BBB-3210B3BD3E8D}" type="datetimeFigureOut">
               <a:rPr lang="en-US" smtClean="0"/>
-              <a:t>3/19/26</a:t>
+              <a:t>8/4/26</a:t>
             </a:fld>
             <a:endParaRPr lang="en-US"/>
           </a:p>
@@ -2427,7 +2428,7 @@
           <a:p>
             <a:fld id="{64F5CC27-B0BF-C043-9BBB-3210B3BD3E8D}" type="datetimeFigureOut">
               <a:rPr lang="en-US" smtClean="0"/>
-              <a:t>3/19/26</a:t>
+              <a:t>8/4/26</a:t>
             </a:fld>
             <a:endParaRPr lang="en-US"/>
           </a:p>
@@ -2568,7 +2569,7 @@
           <a:p>
             <a:fld id="{64F5CC27-B0BF-C043-9BBB-3210B3BD3E8D}" type="datetimeFigureOut">
               <a:rPr lang="en-US" smtClean="0"/>
-              <a:t>3/19/26</a:t>
+              <a:t>8/4/26</a:t>
             </a:fld>
             <a:endParaRPr lang="en-US"/>
           </a:p>
@@ -2681,7 +2682,7 @@
           <a:p>
             <a:fld id="{64F5CC27-B0BF-C043-9BBB-3210B3BD3E8D}" type="datetimeFigureOut">
               <a:rPr lang="en-US" smtClean="0"/>
-              <a:t>3/19/26</a:t>
+              <a:t>8/4/26</a:t>
             </a:fld>
             <a:endParaRPr lang="en-US"/>
           </a:p>
@@ -2992,7 +2993,7 @@
           <a:p>
             <a:fld id="{64F5CC27-B0BF-C043-9BBB-3210B3BD3E8D}" type="datetimeFigureOut">
               <a:rPr lang="en-US" smtClean="0"/>
-              <a:t>3/19/26</a:t>
+              <a:t>8/4/26</a:t>
             </a:fld>
             <a:endParaRPr lang="en-US"/>
           </a:p>
@@ -3280,7 +3281,7 @@
           <a:p>
             <a:fld id="{64F5CC27-B0BF-C043-9BBB-3210B3BD3E8D}" type="datetimeFigureOut">
               <a:rPr lang="en-US" smtClean="0"/>
-              <a:t>3/19/26</a:t>
+              <a:t>8/4/26</a:t>
             </a:fld>
             <a:endParaRPr lang="en-US"/>
           </a:p>
@@ -3521,7 +3522,7 @@
           <a:p>
             <a:fld id="{64F5CC27-B0BF-C043-9BBB-3210B3BD3E8D}" type="datetimeFigureOut">
               <a:rPr lang="en-US" smtClean="0"/>
-              <a:t>3/19/26</a:t>
+              <a:t>8/4/26</a:t>
             </a:fld>
             <a:endParaRPr lang="en-US"/>
           </a:p>
@@ -3940,10 +3941,10 @@
       </p:grpSpPr>
       <p:pic>
         <p:nvPicPr>
-          <p:cNvPr id="39" name="Picture 38">
-            <a:extLst>
-              <a:ext uri="{FF2B5EF4-FFF2-40B4-BE49-F238E27FC236}">
-                <a16:creationId xmlns:a16="http://schemas.microsoft.com/office/drawing/2014/main" id="{B17DFBBC-FC7B-4D17-F5E9-021C6A70974F}"/>
+          <p:cNvPr id="8" name="Picture 7">
+            <a:extLst>
+              <a:ext uri="{FF2B5EF4-FFF2-40B4-BE49-F238E27FC236}">
+                <a16:creationId xmlns:a16="http://schemas.microsoft.com/office/drawing/2014/main" id="{13340317-679C-9FFE-2C90-264D95B7134B}"/>
               </a:ext>
             </a:extLst>
           </p:cNvPr>
@@ -3953,16 +3954,18 @@
           <p:nvPr/>
         </p:nvPicPr>
         <p:blipFill>
-          <a:blip r:embed="rId3"/>
-          <a:srcRect l="2476" t="9332" r="23691" b="4864"/>
+          <a:blip r:embed="rId3">
+            <a:alphaModFix/>
+          </a:blip>
+          <a:srcRect l="2310" t="9551" r="27904" b="4620"/>
           <a:stretch>
             <a:fillRect/>
           </a:stretch>
         </p:blipFill>
         <p:spPr>
           <a:xfrm>
-            <a:off x="2152230" y="1474080"/>
-            <a:ext cx="7901082" cy="4580322"/>
+            <a:off x="2123103" y="892066"/>
+            <a:ext cx="7901082" cy="4580323"/>
           </a:xfrm>
           <a:prstGeom prst="rect">
             <a:avLst/>
@@ -3992,45 +3995,14 @@
         </p:blipFill>
         <p:spPr>
           <a:xfrm>
-            <a:off x="8797737" y="6109256"/>
-            <a:ext cx="1542117" cy="428824"/>
+            <a:off x="2459362" y="5944584"/>
+            <a:ext cx="2397773" cy="666761"/>
           </a:xfrm>
           <a:prstGeom prst="rect">
             <a:avLst/>
           </a:prstGeom>
         </p:spPr>
       </p:pic>
-      <p:pic>
-        <p:nvPicPr>
-          <p:cNvPr id="21" name="Picture 20">
-            <a:extLst>
-              <a:ext uri="{FF2B5EF4-FFF2-40B4-BE49-F238E27FC236}">
-                <a16:creationId xmlns:a16="http://schemas.microsoft.com/office/drawing/2014/main" id="{1E103207-FB79-60BF-F711-862D2090F9DE}"/>
-              </a:ext>
-            </a:extLst>
-          </p:cNvPr>
-          <p:cNvPicPr>
-            <a:picLocks noChangeAspect="1"/>
-          </p:cNvPicPr>
-          <p:nvPr/>
-        </p:nvPicPr>
-        <p:blipFill>
-          <a:blip r:embed="rId4"/>
-          <a:srcRect l="79306" t="12896" r="2274" b="73124"/>
-          <a:stretch>
-            <a:fillRect/>
-          </a:stretch>
-        </p:blipFill>
-        <p:spPr>
-          <a:xfrm>
-            <a:off x="7355778" y="6118399"/>
-            <a:ext cx="1422687" cy="542982"/>
-          </a:xfrm>
-          <a:prstGeom prst="rect">
-            <a:avLst/>
-          </a:prstGeom>
-        </p:spPr>
-      </p:pic>
       <p:sp>
         <p:nvSpPr>
           <p:cNvPr id="27" name="TextBox 26">
@@ -4045,8 +4017,8 @@
         </p:nvSpPr>
         <p:spPr>
           <a:xfrm>
-            <a:off x="2333332" y="979736"/>
-            <a:ext cx="7814080" cy="400110"/>
+            <a:off x="1622336" y="450782"/>
+            <a:ext cx="8816074" cy="461665"/>
           </a:xfrm>
           <a:prstGeom prst="rect">
             <a:avLst/>
@@ -4061,22 +4033,10 @@
           <a:p>
             <a:pPr algn="ctr"/>
             <a:r>
-              <a:rPr lang="en-US" dirty="0">
+              <a:rPr lang="en-US" sz="2400" dirty="0">
                 <a:latin typeface="Century Gothic" panose="020B0502020202020204" pitchFamily="34" charset="0"/>
               </a:rPr>
-              <a:t>Predictive </a:t>
-            </a:r>
-            <a:r>
-              <a:rPr lang="en-US" sz="2000" dirty="0">
-                <a:latin typeface="Century Gothic" panose="020B0502020202020204" pitchFamily="34" charset="0"/>
-              </a:rPr>
-              <a:t>Accuracy</a:t>
-            </a:r>
-            <a:r>
-              <a:rPr lang="en-US" dirty="0">
-                <a:latin typeface="Century Gothic" panose="020B0502020202020204" pitchFamily="34" charset="0"/>
-              </a:rPr>
-              <a:t> Conditioned on Test Distribution</a:t>
+              <a:t>Predictive Accuracy Conditioned on Test Distribution</a:t>
             </a:r>
           </a:p>
         </p:txBody>
@@ -4095,7 +4055,7 @@
         </p:nvSpPr>
         <p:spPr>
           <a:xfrm>
-            <a:off x="3070700" y="2400624"/>
+            <a:off x="3070700" y="1808346"/>
             <a:ext cx="3288485" cy="272510"/>
           </a:xfrm>
           <a:prstGeom prst="rect">
@@ -4143,7 +4103,7 @@
         </p:nvSpPr>
         <p:spPr>
           <a:xfrm>
-            <a:off x="2898725" y="3479334"/>
+            <a:off x="2997902" y="3997378"/>
             <a:ext cx="3632433" cy="272447"/>
           </a:xfrm>
           <a:prstGeom prst="rect">
@@ -4191,8 +4151,8 @@
         </p:nvSpPr>
         <p:spPr>
           <a:xfrm rot="16200000">
-            <a:off x="-674593" y="3778091"/>
-            <a:ext cx="4901637" cy="276999"/>
+            <a:off x="-1100338" y="3130009"/>
+            <a:ext cx="5561370" cy="400110"/>
           </a:xfrm>
           <a:prstGeom prst="rect">
             <a:avLst/>
@@ -4207,7 +4167,7 @@
           <a:p>
             <a:pPr algn="ctr"/>
             <a:r>
-              <a:rPr lang="en-US" sz="1200" dirty="0">
+              <a:rPr lang="en-US" sz="2000" dirty="0">
                 <a:latin typeface="Century Gothic" panose="020B0502020202020204" pitchFamily="34" charset="0"/>
               </a:rPr>
               <a:t>Mean Quadratic Weighted Kappa (QWK)</a:t>
@@ -4229,8 +4189,8 @@
         </p:nvSpPr>
         <p:spPr>
           <a:xfrm rot="16200000">
-            <a:off x="-467867" y="3801180"/>
-            <a:ext cx="4901637" cy="261610"/>
+            <a:off x="-467867" y="3170431"/>
+            <a:ext cx="4901637" cy="338554"/>
           </a:xfrm>
           <a:prstGeom prst="rect">
             <a:avLst/>
@@ -4245,7 +4205,7 @@
           <a:p>
             <a:pPr algn="ctr"/>
             <a:r>
-              <a:rPr lang="en-US" sz="1100" dirty="0">
+              <a:rPr lang="en-US" sz="1600" dirty="0">
                 <a:solidFill>
                   <a:schemeClr val="bg2">
                     <a:lumMod val="50000"/>
@@ -4272,8 +4232,8 @@
         </p:nvSpPr>
         <p:spPr>
           <a:xfrm>
-            <a:off x="2631273" y="6142356"/>
-            <a:ext cx="7031665" cy="276999"/>
+            <a:off x="2416073" y="5408781"/>
+            <a:ext cx="7122968" cy="400110"/>
           </a:xfrm>
           <a:prstGeom prst="rect">
             <a:avLst/>
@@ -4288,7 +4248,7 @@
           <a:p>
             <a:pPr algn="ctr"/>
             <a:r>
-              <a:rPr lang="en-US" sz="1200" dirty="0">
+              <a:rPr lang="en-US" sz="2000" dirty="0">
                 <a:latin typeface="Century Gothic" panose="020B0502020202020204" pitchFamily="34" charset="0"/>
               </a:rPr>
               <a:t>Hidden Layers of Models</a:t>
@@ -4312,8 +4272,8 @@
         </p:nvCxnSpPr>
         <p:spPr>
           <a:xfrm>
-            <a:off x="2239231" y="3931985"/>
-            <a:ext cx="784084" cy="0"/>
+            <a:off x="2239231" y="3339707"/>
+            <a:ext cx="444709" cy="0"/>
           </a:xfrm>
           <a:prstGeom prst="line">
             <a:avLst/>
@@ -4357,8 +4317,8 @@
         </p:nvCxnSpPr>
         <p:spPr>
           <a:xfrm>
-            <a:off x="7079226" y="3931985"/>
-            <a:ext cx="2954936" cy="0"/>
+            <a:off x="6743700" y="3339707"/>
+            <a:ext cx="3290462" cy="0"/>
           </a:xfrm>
           <a:prstGeom prst="line">
             <a:avLst/>
@@ -4402,8 +4362,8 @@
         </p:nvCxnSpPr>
         <p:spPr>
           <a:xfrm>
-            <a:off x="3023315" y="3931985"/>
-            <a:ext cx="4055911" cy="0"/>
+            <a:off x="2683940" y="3339707"/>
+            <a:ext cx="4059760" cy="0"/>
           </a:xfrm>
           <a:prstGeom prst="line">
             <a:avLst/>
@@ -4447,7 +4407,7 @@
         </p:nvCxnSpPr>
         <p:spPr>
           <a:xfrm>
-            <a:off x="2239231" y="4389907"/>
+            <a:off x="2239231" y="3797629"/>
             <a:ext cx="444709" cy="0"/>
           </a:xfrm>
           <a:prstGeom prst="line">
@@ -4493,7 +4453,7 @@
         </p:nvCxnSpPr>
         <p:spPr>
           <a:xfrm>
-            <a:off x="2690037" y="4393183"/>
+            <a:off x="2690037" y="3800905"/>
             <a:ext cx="2167128" cy="0"/>
           </a:xfrm>
           <a:prstGeom prst="line">
@@ -4539,7 +4499,7 @@
         </p:nvCxnSpPr>
         <p:spPr>
           <a:xfrm>
-            <a:off x="4857135" y="4393183"/>
+            <a:off x="4857135" y="3800905"/>
             <a:ext cx="1165123" cy="0"/>
           </a:xfrm>
           <a:prstGeom prst="line">
@@ -4585,8 +4545,8 @@
         </p:nvCxnSpPr>
         <p:spPr>
           <a:xfrm>
-            <a:off x="6037758" y="4393183"/>
-            <a:ext cx="3544066" cy="0"/>
+            <a:off x="6037758" y="3800905"/>
+            <a:ext cx="2991942" cy="0"/>
           </a:xfrm>
           <a:prstGeom prst="line">
             <a:avLst/>
@@ -4631,8 +4591,8 @@
         </p:nvCxnSpPr>
         <p:spPr>
           <a:xfrm>
-            <a:off x="9581824" y="4393183"/>
-            <a:ext cx="452338" cy="0"/>
+            <a:off x="9029700" y="3800905"/>
+            <a:ext cx="1004462" cy="0"/>
           </a:xfrm>
           <a:prstGeom prst="line">
             <a:avLst/>
@@ -4675,7 +4635,7 @@
         </p:nvSpPr>
         <p:spPr>
           <a:xfrm>
-            <a:off x="8189356" y="3673709"/>
+            <a:off x="8423152" y="3081431"/>
             <a:ext cx="2292458" cy="258276"/>
           </a:xfrm>
           <a:prstGeom prst="rect">
@@ -4696,7 +4656,7 @@
               <a:buNone/>
             </a:pPr>
             <a:r>
-              <a:rPr lang="en-US" sz="900" dirty="0">
+              <a:rPr lang="en-US" sz="1000" dirty="0">
                 <a:solidFill>
                   <a:schemeClr val="bg2">
                     <a:lumMod val="50000"/>
@@ -4723,7 +4683,7 @@
         </p:nvSpPr>
         <p:spPr>
           <a:xfrm>
-            <a:off x="8189356" y="4131631"/>
+            <a:off x="8421185" y="3539353"/>
             <a:ext cx="2292458" cy="258276"/>
           </a:xfrm>
           <a:prstGeom prst="rect">
@@ -4757,10 +4717,163 @@
           </a:p>
         </p:txBody>
       </p:sp>
+      <p:pic>
+        <p:nvPicPr>
+          <p:cNvPr id="2" name="Picture 1">
+            <a:extLst>
+              <a:ext uri="{FF2B5EF4-FFF2-40B4-BE49-F238E27FC236}">
+                <a16:creationId xmlns:a16="http://schemas.microsoft.com/office/drawing/2014/main" id="{19579EBB-6408-7E17-483E-384A64F7B84D}"/>
+              </a:ext>
+            </a:extLst>
+          </p:cNvPr>
+          <p:cNvPicPr>
+            <a:picLocks noChangeAspect="1"/>
+          </p:cNvPicPr>
+          <p:nvPr/>
+        </p:nvPicPr>
+        <p:blipFill>
+          <a:blip r:embed="rId3"/>
+          <a:srcRect l="75564" t="29369" r="1153" b="58460"/>
+          <a:stretch>
+            <a:fillRect/>
+          </a:stretch>
+        </p:blipFill>
+        <p:spPr>
+          <a:xfrm>
+            <a:off x="7352689" y="5996538"/>
+            <a:ext cx="2446688" cy="639523"/>
+          </a:xfrm>
+          <a:prstGeom prst="rect">
+            <a:avLst/>
+          </a:prstGeom>
+        </p:spPr>
+      </p:pic>
+      <p:pic>
+        <p:nvPicPr>
+          <p:cNvPr id="3" name="Picture 2">
+            <a:extLst>
+              <a:ext uri="{FF2B5EF4-FFF2-40B4-BE49-F238E27FC236}">
+                <a16:creationId xmlns:a16="http://schemas.microsoft.com/office/drawing/2014/main" id="{2B1E06EE-BA28-210C-C84A-21ADCA195E76}"/>
+              </a:ext>
+            </a:extLst>
+          </p:cNvPr>
+          <p:cNvPicPr>
+            <a:picLocks noChangeAspect="1"/>
+          </p:cNvPicPr>
+          <p:nvPr/>
+        </p:nvPicPr>
+        <p:blipFill>
+          <a:blip r:embed="rId3"/>
+          <a:srcRect l="75564" t="12822" r="14466" b="84299"/>
+          <a:stretch>
+            <a:fillRect/>
+          </a:stretch>
+        </p:blipFill>
+        <p:spPr>
+          <a:xfrm>
+            <a:off x="4985078" y="5838216"/>
+            <a:ext cx="1422275" cy="205379"/>
+          </a:xfrm>
+          <a:prstGeom prst="rect">
+            <a:avLst/>
+          </a:prstGeom>
+        </p:spPr>
+      </p:pic>
+      <p:pic>
+        <p:nvPicPr>
+          <p:cNvPr id="9" name="Picture 8">
+            <a:extLst>
+              <a:ext uri="{FF2B5EF4-FFF2-40B4-BE49-F238E27FC236}">
+                <a16:creationId xmlns:a16="http://schemas.microsoft.com/office/drawing/2014/main" id="{AB59361F-C77D-8A12-433D-D99C7E35BBEF}"/>
+              </a:ext>
+            </a:extLst>
+          </p:cNvPr>
+          <p:cNvPicPr>
+            <a:picLocks noChangeAspect="1"/>
+          </p:cNvPicPr>
+          <p:nvPr/>
+        </p:nvPicPr>
+        <p:blipFill>
+          <a:blip r:embed="rId3"/>
+          <a:srcRect l="75566" t="16180" r="2021" b="70620"/>
+          <a:stretch>
+            <a:fillRect/>
+          </a:stretch>
+        </p:blipFill>
+        <p:spPr>
+          <a:xfrm>
+            <a:off x="5029968" y="6043595"/>
+            <a:ext cx="2355299" cy="693609"/>
+          </a:xfrm>
+          <a:prstGeom prst="rect">
+            <a:avLst/>
+          </a:prstGeom>
+        </p:spPr>
+      </p:pic>
     </p:spTree>
     <p:extLst>
       <p:ext uri="{BB962C8B-B14F-4D97-AF65-F5344CB8AC3E}">
         <p14:creationId xmlns:p14="http://schemas.microsoft.com/office/powerpoint/2010/main" val="2652357004"/>
+      </p:ext>
+    </p:extLst>
+  </p:cSld>
+  <p:clrMapOvr>
+    <a:masterClrMapping/>
+  </p:clrMapOvr>
+</p:sld>
+</file>
+
+<file path=ppt/slides/slide10.xml><?xml version="1.0" encoding="utf-8"?>
+<p:sld xmlns:a="http://schemas.openxmlformats.org/drawingml/2006/main" xmlns:r="http://schemas.openxmlformats.org/officeDocument/2006/relationships" xmlns:p="http://schemas.openxmlformats.org/presentationml/2006/main">
+  <p:cSld>
+    <p:spTree>
+      <p:nvGrpSpPr>
+        <p:cNvPr id="1" name=""/>
+        <p:cNvGrpSpPr/>
+        <p:nvPr/>
+      </p:nvGrpSpPr>
+      <p:grpSpPr>
+        <a:xfrm>
+          <a:off x="0" y="0"/>
+          <a:ext cx="0" cy="0"/>
+          <a:chOff x="0" y="0"/>
+          <a:chExt cx="0" cy="0"/>
+        </a:xfrm>
+      </p:grpSpPr>
+      <p:pic>
+        <p:nvPicPr>
+          <p:cNvPr id="5" name="Picture 4">
+            <a:extLst>
+              <a:ext uri="{FF2B5EF4-FFF2-40B4-BE49-F238E27FC236}">
+                <a16:creationId xmlns:a16="http://schemas.microsoft.com/office/drawing/2014/main" id="{9541B003-6CBD-83A5-9510-57F77A146B44}"/>
+              </a:ext>
+            </a:extLst>
+          </p:cNvPr>
+          <p:cNvPicPr>
+            <a:picLocks noChangeAspect="1"/>
+          </p:cNvPicPr>
+          <p:nvPr/>
+        </p:nvPicPr>
+        <p:blipFill>
+          <a:blip r:embed="rId2"/>
+          <a:stretch>
+            <a:fillRect/>
+          </a:stretch>
+        </p:blipFill>
+        <p:spPr>
+          <a:xfrm>
+            <a:off x="2220687" y="335401"/>
+            <a:ext cx="6357999" cy="5880672"/>
+          </a:xfrm>
+          <a:prstGeom prst="rect">
+            <a:avLst/>
+          </a:prstGeom>
+        </p:spPr>
+      </p:pic>
+    </p:spTree>
+    <p:extLst>
+      <p:ext uri="{BB962C8B-B14F-4D97-AF65-F5344CB8AC3E}">
+        <p14:creationId xmlns:p14="http://schemas.microsoft.com/office/powerpoint/2010/main" val="3986391045"/>
       </p:ext>
     </p:extLst>
   </p:cSld>
@@ -4810,8 +4923,8 @@
         </p:blipFill>
         <p:spPr>
           <a:xfrm>
-            <a:off x="8062543" y="5889074"/>
-            <a:ext cx="1482928" cy="968926"/>
+            <a:off x="2269583" y="5389487"/>
+            <a:ext cx="2041159" cy="1333667"/>
           </a:xfrm>
           <a:prstGeom prst="rect">
             <a:avLst/>
@@ -4843,8 +4956,8 @@
         </p:blipFill>
         <p:spPr>
           <a:xfrm>
-            <a:off x="1589710" y="484155"/>
-            <a:ext cx="9355001" cy="5416825"/>
+            <a:off x="1956962" y="311787"/>
+            <a:ext cx="8712379" cy="5044727"/>
           </a:xfrm>
           <a:prstGeom prst="rect">
             <a:avLst/>
@@ -4865,8 +4978,8 @@
         </p:nvSpPr>
         <p:spPr>
           <a:xfrm rot="16200000">
-            <a:off x="-1483094" y="2974074"/>
-            <a:ext cx="5287615" cy="307777"/>
+            <a:off x="-1139693" y="2806390"/>
+            <a:ext cx="5466629" cy="400110"/>
           </a:xfrm>
           <a:prstGeom prst="rect">
             <a:avLst/>
@@ -4881,7 +4994,7 @@
           <a:p>
             <a:pPr algn="ctr"/>
             <a:r>
-              <a:rPr lang="en-US" sz="1400" dirty="0">
+              <a:rPr lang="en-US" sz="2000" dirty="0">
                 <a:latin typeface="Century Gothic" panose="020B0502020202020204" pitchFamily="34" charset="0"/>
               </a:rPr>
               <a:t>Mean Quadratic Weighted Kappa (QWK)</a:t>
@@ -4903,8 +5016,8 @@
         </p:nvSpPr>
         <p:spPr>
           <a:xfrm rot="16200000">
-            <a:off x="-1277069" y="3004859"/>
-            <a:ext cx="5287615" cy="276999"/>
+            <a:off x="-829262" y="2828569"/>
+            <a:ext cx="5372118" cy="338554"/>
           </a:xfrm>
           <a:prstGeom prst="rect">
             <a:avLst/>
@@ -4919,7 +5032,7 @@
           <a:p>
             <a:pPr algn="ctr"/>
             <a:r>
-              <a:rPr lang="en-US" sz="1200" dirty="0">
+              <a:rPr lang="en-US" sz="1600" dirty="0">
                 <a:solidFill>
                   <a:schemeClr val="bg2">
                     <a:lumMod val="50000"/>
@@ -4946,8 +5059,8 @@
         </p:nvSpPr>
         <p:spPr>
           <a:xfrm>
-            <a:off x="1599648" y="5916375"/>
-            <a:ext cx="9355001" cy="276999"/>
+            <a:off x="2410691" y="5376128"/>
+            <a:ext cx="7964632" cy="400110"/>
           </a:xfrm>
           <a:prstGeom prst="rect">
             <a:avLst/>
@@ -4962,7 +5075,7 @@
           <a:p>
             <a:pPr algn="ctr"/>
             <a:r>
-              <a:rPr lang="en-US" sz="1200" dirty="0">
+              <a:rPr lang="en-US" sz="2000" dirty="0">
                 <a:latin typeface="Century Gothic" panose="020B0502020202020204" pitchFamily="34" charset="0"/>
               </a:rPr>
               <a:t>Hidden Layers of Qwen3-4B</a:t>
@@ -4984,8 +5097,8 @@
         </p:nvSpPr>
         <p:spPr>
           <a:xfrm>
-            <a:off x="2370108" y="69573"/>
-            <a:ext cx="7814080" cy="400110"/>
+            <a:off x="2370108" y="0"/>
+            <a:ext cx="7814080" cy="461665"/>
           </a:xfrm>
           <a:prstGeom prst="rect">
             <a:avLst/>
@@ -5000,20 +5113,11 @@
           <a:p>
             <a:pPr algn="ctr"/>
             <a:r>
-              <a:rPr lang="en-US" dirty="0">
+              <a:rPr lang="en-US" sz="2400" dirty="0">
                 <a:latin typeface="Century Gothic" panose="020B0502020202020204" pitchFamily="34" charset="0"/>
               </a:rPr>
-              <a:t>Predictive </a:t>
-            </a:r>
-            <a:r>
-              <a:rPr lang="en-US" sz="2000" dirty="0">
-                <a:latin typeface="Century Gothic" panose="020B0502020202020204" pitchFamily="34" charset="0"/>
-              </a:rPr>
-              <a:t>Accuracy of Probes for Qwen3-4B</a:t>
-            </a:r>
-            <a:endParaRPr lang="en-US" dirty="0">
-              <a:latin typeface="Century Gothic" panose="020B0502020202020204" pitchFamily="34" charset="0"/>
-            </a:endParaRPr>
+              <a:t>Predictive Accuracy of Probes for Qwen3-4B</a:t>
+            </a:r>
           </a:p>
         </p:txBody>
       </p:sp>
@@ -5040,8 +5144,8 @@
         </p:blipFill>
         <p:spPr>
           <a:xfrm>
-            <a:off x="9545471" y="5916375"/>
-            <a:ext cx="1674347" cy="457470"/>
+            <a:off x="4310742" y="5903737"/>
+            <a:ext cx="2532427" cy="691917"/>
           </a:xfrm>
           <a:prstGeom prst="rect">
             <a:avLst/>
@@ -5088,10 +5192,10 @@
       </p:grpSpPr>
       <p:pic>
         <p:nvPicPr>
-          <p:cNvPr id="7" name="Picture 6">
-            <a:extLst>
-              <a:ext uri="{FF2B5EF4-FFF2-40B4-BE49-F238E27FC236}">
-                <a16:creationId xmlns:a16="http://schemas.microsoft.com/office/drawing/2014/main" id="{22C6E204-2875-F878-FDF1-07378D910D7A}"/>
+          <p:cNvPr id="9" name="Picture 8">
+            <a:extLst>
+              <a:ext uri="{FF2B5EF4-FFF2-40B4-BE49-F238E27FC236}">
+                <a16:creationId xmlns:a16="http://schemas.microsoft.com/office/drawing/2014/main" id="{13DADFE5-CA53-3561-10C4-B372F82D4EDB}"/>
               </a:ext>
             </a:extLst>
           </p:cNvPr>
@@ -5102,15 +5206,15 @@
         </p:nvPicPr>
         <p:blipFill>
           <a:blip r:embed="rId2"/>
-          <a:srcRect l="2024" t="7863" r="13356" b="5597"/>
+          <a:srcRect l="2246" t="8892" r="14506" b="4567"/>
           <a:stretch>
             <a:fillRect/>
           </a:stretch>
         </p:blipFill>
         <p:spPr>
           <a:xfrm>
-            <a:off x="741125" y="2087118"/>
-            <a:ext cx="5291666" cy="2683764"/>
+            <a:off x="6073290" y="2203038"/>
+            <a:ext cx="5796993" cy="2988539"/>
           </a:xfrm>
           <a:prstGeom prst="rect">
             <a:avLst/>
@@ -5119,10 +5223,10 @@
       </p:pic>
       <p:pic>
         <p:nvPicPr>
-          <p:cNvPr id="9" name="Picture 8">
-            <a:extLst>
-              <a:ext uri="{FF2B5EF4-FFF2-40B4-BE49-F238E27FC236}">
-                <a16:creationId xmlns:a16="http://schemas.microsoft.com/office/drawing/2014/main" id="{13DADFE5-CA53-3561-10C4-B372F82D4EDB}"/>
+          <p:cNvPr id="7" name="Picture 6">
+            <a:extLst>
+              <a:ext uri="{FF2B5EF4-FFF2-40B4-BE49-F238E27FC236}">
+                <a16:creationId xmlns:a16="http://schemas.microsoft.com/office/drawing/2014/main" id="{22C6E204-2875-F878-FDF1-07378D910D7A}"/>
               </a:ext>
             </a:extLst>
           </p:cNvPr>
@@ -5133,15 +5237,15 @@
         </p:nvPicPr>
         <p:blipFill>
           <a:blip r:embed="rId3"/>
-          <a:srcRect l="2246" t="8892" r="14506" b="4567"/>
+          <a:srcRect l="2491" t="8783" r="16176" b="4893"/>
           <a:stretch>
             <a:fillRect/>
           </a:stretch>
         </p:blipFill>
         <p:spPr>
           <a:xfrm>
-            <a:off x="6114817" y="2064986"/>
-            <a:ext cx="5291667" cy="2728027"/>
+            <a:off x="430561" y="2185783"/>
+            <a:ext cx="5659890" cy="2988539"/>
           </a:xfrm>
           <a:prstGeom prst="rect">
             <a:avLst/>
@@ -5162,7 +5266,7 @@
         </p:nvSpPr>
         <p:spPr>
           <a:xfrm>
-            <a:off x="1019614" y="4793013"/>
+            <a:off x="770987" y="5096111"/>
             <a:ext cx="5013177" cy="246221"/>
           </a:xfrm>
           <a:prstGeom prst="rect">
@@ -5200,7 +5304,7 @@
         </p:nvSpPr>
         <p:spPr>
           <a:xfrm>
-            <a:off x="6114819" y="4793012"/>
+            <a:off x="6567980" y="5096111"/>
             <a:ext cx="5013177" cy="246221"/>
           </a:xfrm>
           <a:prstGeom prst="rect">
@@ -5238,8 +5342,8 @@
         </p:nvSpPr>
         <p:spPr>
           <a:xfrm rot="16200000">
-            <a:off x="-731563" y="3298195"/>
-            <a:ext cx="2683765" cy="261610"/>
+            <a:off x="-1253913" y="3223216"/>
+            <a:ext cx="2988539" cy="523220"/>
           </a:xfrm>
           <a:prstGeom prst="rect">
             <a:avLst/>
@@ -5254,7 +5358,7 @@
           <a:p>
             <a:pPr algn="ctr"/>
             <a:r>
-              <a:rPr lang="en-US" sz="1050" dirty="0">
+              <a:rPr lang="en-US" sz="1400" dirty="0">
                 <a:latin typeface="Century Gothic" panose="020B0502020202020204" pitchFamily="34" charset="0"/>
               </a:rPr>
               <a:t>Quadratic Weighted Kappa (QWK)</a:t>
@@ -5276,7 +5380,7 @@
         </p:nvSpPr>
         <p:spPr>
           <a:xfrm>
-            <a:off x="2188960" y="1384363"/>
+            <a:off x="2188960" y="1498656"/>
             <a:ext cx="7814080" cy="369332"/>
           </a:xfrm>
           <a:prstGeom prst="rect">
@@ -5480,7 +5584,7 @@
         </p:nvSpPr>
         <p:spPr>
           <a:xfrm>
-            <a:off x="1002736" y="1815249"/>
+            <a:off x="945903" y="1931169"/>
             <a:ext cx="4838261" cy="271869"/>
           </a:xfrm>
           <a:prstGeom prst="rect">
@@ -5523,7 +5627,7 @@
         </p:nvSpPr>
         <p:spPr>
           <a:xfrm>
-            <a:off x="6472572" y="1793117"/>
+            <a:off x="6552655" y="1931169"/>
             <a:ext cx="4838261" cy="271869"/>
           </a:xfrm>
           <a:prstGeom prst="rect">
@@ -6198,7 +6302,7 @@
         </p:nvSpPr>
         <p:spPr>
           <a:xfrm>
-            <a:off x="226238" y="318995"/>
+            <a:off x="209088" y="49472"/>
             <a:ext cx="3286539" cy="369332"/>
           </a:xfrm>
           <a:prstGeom prst="rect">
@@ -6402,7 +6506,7 @@
         </p:nvSpPr>
         <p:spPr>
           <a:xfrm>
-            <a:off x="226238" y="677154"/>
+            <a:off x="209088" y="407631"/>
             <a:ext cx="3286539" cy="950051"/>
           </a:xfrm>
           <a:prstGeom prst="rect">
@@ -6492,7 +6596,7 @@
         </p:blipFill>
         <p:spPr>
           <a:xfrm>
-            <a:off x="226238" y="275963"/>
+            <a:off x="209088" y="6440"/>
             <a:ext cx="431584" cy="401191"/>
           </a:xfrm>
           <a:prstGeom prst="rect">
@@ -6514,7 +6618,7 @@
         </p:nvCxnSpPr>
         <p:spPr>
           <a:xfrm flipV="1">
-            <a:off x="3507377" y="1156559"/>
+            <a:off x="3507377" y="838135"/>
             <a:ext cx="675861" cy="2107"/>
           </a:xfrm>
           <a:prstGeom prst="line">
@@ -8150,10 +8254,8 @@
           </p:nvPicPr>
           <p:blipFill>
             <a:blip r:embed="rId6"/>
-            <a:srcRect l="2947" t="9081" r="38874"/>
-            <a:stretch>
-              <a:fillRect/>
-            </a:stretch>
+            <a:srcRect l="3873" r="3873"/>
+            <a:stretch/>
           </p:blipFill>
           <p:spPr>
             <a:xfrm>
@@ -9273,1053 +9375,125 @@
           </a:p>
         </p:txBody>
       </p:sp>
-    </p:spTree>
-    <p:extLst>
-      <p:ext uri="{BB962C8B-B14F-4D97-AF65-F5344CB8AC3E}">
-        <p14:creationId xmlns:p14="http://schemas.microsoft.com/office/powerpoint/2010/main" val="319037333"/>
-      </p:ext>
-    </p:extLst>
-  </p:cSld>
-  <p:clrMapOvr>
-    <a:masterClrMapping/>
-  </p:clrMapOvr>
-</p:sld>
-</file>
-
-<file path=ppt/slides/slide6.xml><?xml version="1.0" encoding="utf-8"?>
-<p:sld xmlns:a="http://schemas.openxmlformats.org/drawingml/2006/main" xmlns:r="http://schemas.openxmlformats.org/officeDocument/2006/relationships" xmlns:p="http://schemas.openxmlformats.org/presentationml/2006/main">
-  <p:cSld>
-    <p:spTree>
-      <p:nvGrpSpPr>
-        <p:cNvPr id="1" name=""/>
-        <p:cNvGrpSpPr/>
-        <p:nvPr/>
-      </p:nvGrpSpPr>
-      <p:grpSpPr>
-        <a:xfrm>
-          <a:off x="0" y="0"/>
-          <a:ext cx="0" cy="0"/>
-          <a:chOff x="0" y="0"/>
-          <a:chExt cx="0" cy="0"/>
-        </a:xfrm>
-      </p:grpSpPr>
-      <p:sp>
-        <p:nvSpPr>
-          <p:cNvPr id="5" name="Rectangle 4">
-            <a:extLst>
-              <a:ext uri="{FF2B5EF4-FFF2-40B4-BE49-F238E27FC236}">
-                <a16:creationId xmlns:a16="http://schemas.microsoft.com/office/drawing/2014/main" id="{36B51899-C836-D343-D530-6495C7BD34B0}"/>
-              </a:ext>
-            </a:extLst>
-          </p:cNvPr>
-          <p:cNvSpPr/>
+      <p:grpSp>
+        <p:nvGrpSpPr>
+          <p:cNvPr id="3" name="Group 2">
+            <a:extLst>
+              <a:ext uri="{FF2B5EF4-FFF2-40B4-BE49-F238E27FC236}">
+                <a16:creationId xmlns:a16="http://schemas.microsoft.com/office/drawing/2014/main" id="{C7F2AFF5-1237-7CC1-D8A1-799193C6E873}"/>
+              </a:ext>
+            </a:extLst>
+          </p:cNvPr>
+          <p:cNvGrpSpPr/>
           <p:nvPr/>
-        </p:nvSpPr>
-        <p:spPr>
+        </p:nvGrpSpPr>
+        <p:grpSpPr>
           <a:xfrm>
-            <a:off x="4660669" y="1650804"/>
-            <a:ext cx="3117047" cy="992408"/>
+            <a:off x="10186422" y="1425502"/>
+            <a:ext cx="1756620" cy="1314023"/>
+            <a:chOff x="7388029" y="1262358"/>
+            <a:chExt cx="1914722" cy="1432290"/>
+          </a:xfrm>
+        </p:grpSpPr>
+        <p:pic>
+          <p:nvPicPr>
+            <p:cNvPr id="4" name="Picture 3">
+              <a:extLst>
+                <a:ext uri="{FF2B5EF4-FFF2-40B4-BE49-F238E27FC236}">
+                  <a16:creationId xmlns:a16="http://schemas.microsoft.com/office/drawing/2014/main" id="{5A900D61-61C1-5D34-67C1-F151671D910E}"/>
+                </a:ext>
+              </a:extLst>
+            </p:cNvPr>
+            <p:cNvPicPr>
+              <a:picLocks noChangeAspect="1"/>
+            </p:cNvPicPr>
+            <p:nvPr/>
+          </p:nvPicPr>
+          <p:blipFill>
+            <a:blip r:embed="rId8"/>
+            <a:srcRect l="74628" t="11546" r="736" b="57741"/>
+            <a:stretch>
+              <a:fillRect/>
+            </a:stretch>
+          </p:blipFill>
+          <p:spPr>
+            <a:xfrm>
+              <a:off x="7388029" y="1262358"/>
+              <a:ext cx="1914722" cy="1432290"/>
+            </a:xfrm>
+            <a:prstGeom prst="rect">
+              <a:avLst/>
+            </a:prstGeom>
+          </p:spPr>
+        </p:pic>
+        <p:pic>
+          <p:nvPicPr>
+            <p:cNvPr id="5" name="Picture 4">
+              <a:extLst>
+                <a:ext uri="{FF2B5EF4-FFF2-40B4-BE49-F238E27FC236}">
+                  <a16:creationId xmlns:a16="http://schemas.microsoft.com/office/drawing/2014/main" id="{284CF4E9-979C-0DEE-949D-68BAC75AA9C1}"/>
+                </a:ext>
+              </a:extLst>
+            </p:cNvPr>
+            <p:cNvPicPr>
+              <a:picLocks noChangeAspect="1"/>
+            </p:cNvPicPr>
+            <p:nvPr/>
+          </p:nvPicPr>
+          <p:blipFill>
+            <a:blip r:embed="rId9"/>
+            <a:srcRect l="78605" t="16300" r="602" b="58365"/>
+            <a:stretch>
+              <a:fillRect/>
+            </a:stretch>
+          </p:blipFill>
+          <p:spPr>
+            <a:xfrm>
+              <a:off x="7664450" y="1330324"/>
+              <a:ext cx="1638300" cy="1026652"/>
+            </a:xfrm>
+            <a:prstGeom prst="rect">
+              <a:avLst/>
+            </a:prstGeom>
+          </p:spPr>
+        </p:pic>
+      </p:grpSp>
+      <p:pic>
+        <p:nvPicPr>
+          <p:cNvPr id="12" name="Picture 11">
+            <a:extLst>
+              <a:ext uri="{FF2B5EF4-FFF2-40B4-BE49-F238E27FC236}">
+                <a16:creationId xmlns:a16="http://schemas.microsoft.com/office/drawing/2014/main" id="{49AA89BB-73A9-C483-1F95-CD7A7DE54B13}"/>
+              </a:ext>
+            </a:extLst>
+          </p:cNvPr>
+          <p:cNvPicPr>
+            <a:picLocks noChangeAspect="1"/>
+          </p:cNvPicPr>
+          <p:nvPr/>
+        </p:nvPicPr>
+        <p:blipFill>
+          <a:blip r:embed="rId10"/>
+          <a:stretch>
+            <a:fillRect/>
+          </a:stretch>
+        </p:blipFill>
+        <p:spPr>
+          <a:xfrm>
+            <a:off x="126052" y="752292"/>
+            <a:ext cx="3550040" cy="1199338"/>
           </a:xfrm>
           <a:prstGeom prst="rect">
             <a:avLst/>
           </a:prstGeom>
-          <a:solidFill>
-            <a:schemeClr val="accent6">
-              <a:lumMod val="20000"/>
-              <a:lumOff val="80000"/>
-            </a:schemeClr>
-          </a:solidFill>
-        </p:spPr>
-        <p:style>
-          <a:lnRef idx="2">
-            <a:schemeClr val="dk1"/>
-          </a:lnRef>
-          <a:fillRef idx="1">
-            <a:schemeClr val="lt1"/>
-          </a:fillRef>
-          <a:effectRef idx="0">
-            <a:schemeClr val="dk1"/>
-          </a:effectRef>
-          <a:fontRef idx="minor">
-            <a:schemeClr val="dk1"/>
-          </a:fontRef>
-        </p:style>
-        <p:txBody>
-          <a:bodyPr rtlCol="0" anchor="ctr"/>
-          <a:lstStyle/>
-          <a:p>
-            <a:pPr algn="ctr"/>
-            <a:r>
-              <a:rPr lang="en-US" dirty="0">
-                <a:latin typeface="Century Gothic" panose="020B0502020202020204" pitchFamily="34" charset="0"/>
-              </a:rPr>
-              <a:t>Large Language Model</a:t>
-            </a:r>
-          </a:p>
-        </p:txBody>
-      </p:sp>
-      <p:sp>
-        <p:nvSpPr>
-          <p:cNvPr id="7" name="Rectangle 6">
-            <a:extLst>
-              <a:ext uri="{FF2B5EF4-FFF2-40B4-BE49-F238E27FC236}">
-                <a16:creationId xmlns:a16="http://schemas.microsoft.com/office/drawing/2014/main" id="{1ED5378E-C288-58E0-62C0-1C6989F1C6C7}"/>
-              </a:ext>
-            </a:extLst>
-          </p:cNvPr>
-          <p:cNvSpPr/>
-          <p:nvPr/>
-        </p:nvSpPr>
-        <p:spPr>
-          <a:xfrm>
-            <a:off x="4660669" y="362771"/>
-            <a:ext cx="3117047" cy="992408"/>
-          </a:xfrm>
-          <a:prstGeom prst="rect">
-            <a:avLst/>
-          </a:prstGeom>
-          <a:solidFill>
-            <a:schemeClr val="accent6">
-              <a:lumMod val="20000"/>
-              <a:lumOff val="80000"/>
-            </a:schemeClr>
-          </a:solidFill>
-        </p:spPr>
-        <p:style>
-          <a:lnRef idx="2">
-            <a:schemeClr val="dk1"/>
-          </a:lnRef>
-          <a:fillRef idx="1">
-            <a:schemeClr val="lt1"/>
-          </a:fillRef>
-          <a:effectRef idx="0">
-            <a:schemeClr val="dk1"/>
-          </a:effectRef>
-          <a:fontRef idx="minor">
-            <a:schemeClr val="dk1"/>
-          </a:fontRef>
-        </p:style>
-        <p:txBody>
-          <a:bodyPr rtlCol="0" anchor="ctr"/>
-          <a:lstStyle/>
-          <a:p>
-            <a:pPr algn="ctr"/>
-            <a:r>
-              <a:rPr lang="en-US" dirty="0">
-                <a:latin typeface="Century Gothic" panose="020B0502020202020204" pitchFamily="34" charset="0"/>
-              </a:rPr>
-              <a:t>Training Data</a:t>
-            </a:r>
-          </a:p>
-        </p:txBody>
-      </p:sp>
-      <p:sp>
-        <p:nvSpPr>
-          <p:cNvPr id="8" name="Rectangle 7">
-            <a:extLst>
-              <a:ext uri="{FF2B5EF4-FFF2-40B4-BE49-F238E27FC236}">
-                <a16:creationId xmlns:a16="http://schemas.microsoft.com/office/drawing/2014/main" id="{7AEE06E3-7A5A-DFA7-B93F-C84E37A3E167}"/>
-              </a:ext>
-            </a:extLst>
-          </p:cNvPr>
-          <p:cNvSpPr/>
-          <p:nvPr/>
-        </p:nvSpPr>
-        <p:spPr>
-          <a:xfrm>
-            <a:off x="8024677" y="4226373"/>
-            <a:ext cx="3117047" cy="992408"/>
-          </a:xfrm>
-          <a:prstGeom prst="rect">
-            <a:avLst/>
-          </a:prstGeom>
-          <a:solidFill>
-            <a:srgbClr val="FABB00">
-              <a:alpha val="54118"/>
-            </a:srgbClr>
-          </a:solidFill>
-        </p:spPr>
-        <p:style>
-          <a:lnRef idx="2">
-            <a:schemeClr val="dk1"/>
-          </a:lnRef>
-          <a:fillRef idx="1">
-            <a:schemeClr val="lt1"/>
-          </a:fillRef>
-          <a:effectRef idx="0">
-            <a:schemeClr val="dk1"/>
-          </a:effectRef>
-          <a:fontRef idx="minor">
-            <a:schemeClr val="dk1"/>
-          </a:fontRef>
-        </p:style>
-        <p:txBody>
-          <a:bodyPr rtlCol="0" anchor="ctr"/>
-          <a:lstStyle/>
-          <a:p>
-            <a:pPr algn="ctr"/>
-            <a:r>
-              <a:rPr lang="en-US" dirty="0">
-                <a:latin typeface="Century Gothic" panose="020B0502020202020204" pitchFamily="34" charset="0"/>
-              </a:rPr>
-              <a:t>Probe Training Data</a:t>
-            </a:r>
-          </a:p>
-        </p:txBody>
-      </p:sp>
-      <p:sp>
-        <p:nvSpPr>
-          <p:cNvPr id="9" name="Rectangle 8">
-            <a:extLst>
-              <a:ext uri="{FF2B5EF4-FFF2-40B4-BE49-F238E27FC236}">
-                <a16:creationId xmlns:a16="http://schemas.microsoft.com/office/drawing/2014/main" id="{C79FF67E-06E5-B06B-27CC-7F5F93F16053}"/>
-              </a:ext>
-            </a:extLst>
-          </p:cNvPr>
-          <p:cNvSpPr/>
-          <p:nvPr/>
-        </p:nvSpPr>
-        <p:spPr>
-          <a:xfrm>
-            <a:off x="1110268" y="362771"/>
-            <a:ext cx="3278477" cy="992408"/>
-          </a:xfrm>
-          <a:prstGeom prst="rect">
-            <a:avLst/>
-          </a:prstGeom>
-          <a:solidFill>
-            <a:srgbClr val="D9F2D0">
-              <a:alpha val="52941"/>
-            </a:srgbClr>
-          </a:solidFill>
-          <a:ln>
-            <a:prstDash val="dash"/>
-          </a:ln>
-        </p:spPr>
-        <p:style>
-          <a:lnRef idx="2">
-            <a:schemeClr val="dk1"/>
-          </a:lnRef>
-          <a:fillRef idx="1">
-            <a:schemeClr val="lt1"/>
-          </a:fillRef>
-          <a:effectRef idx="0">
-            <a:schemeClr val="dk1"/>
-          </a:effectRef>
-          <a:fontRef idx="minor">
-            <a:schemeClr val="dk1"/>
-          </a:fontRef>
-        </p:style>
-        <p:txBody>
-          <a:bodyPr rtlCol="0" anchor="ctr"/>
-          <a:lstStyle/>
-          <a:p>
-            <a:pPr algn="ctr"/>
-            <a:r>
-              <a:rPr lang="en-US" dirty="0">
-                <a:latin typeface="Century Gothic" panose="020B0502020202020204" pitchFamily="34" charset="0"/>
-              </a:rPr>
-              <a:t>Training Data Bias</a:t>
-            </a:r>
-          </a:p>
-        </p:txBody>
-      </p:sp>
-      <p:sp>
-        <p:nvSpPr>
-          <p:cNvPr id="10" name="Rectangle 9">
-            <a:extLst>
-              <a:ext uri="{FF2B5EF4-FFF2-40B4-BE49-F238E27FC236}">
-                <a16:creationId xmlns:a16="http://schemas.microsoft.com/office/drawing/2014/main" id="{7899B159-D439-3F25-880E-7039CB958E0F}"/>
-              </a:ext>
-            </a:extLst>
-          </p:cNvPr>
-          <p:cNvSpPr/>
-          <p:nvPr/>
-        </p:nvSpPr>
-        <p:spPr>
-          <a:xfrm>
-            <a:off x="1110268" y="1650804"/>
-            <a:ext cx="3278477" cy="992408"/>
-          </a:xfrm>
-          <a:prstGeom prst="rect">
-            <a:avLst/>
-          </a:prstGeom>
-          <a:solidFill>
-            <a:srgbClr val="D9F2D0">
-              <a:alpha val="52941"/>
-            </a:srgbClr>
-          </a:solidFill>
-          <a:ln>
-            <a:prstDash val="dash"/>
-          </a:ln>
-        </p:spPr>
-        <p:style>
-          <a:lnRef idx="2">
-            <a:schemeClr val="dk1"/>
-          </a:lnRef>
-          <a:fillRef idx="1">
-            <a:schemeClr val="lt1"/>
-          </a:fillRef>
-          <a:effectRef idx="0">
-            <a:schemeClr val="dk1"/>
-          </a:effectRef>
-          <a:fontRef idx="minor">
-            <a:schemeClr val="dk1"/>
-          </a:fontRef>
-        </p:style>
-        <p:txBody>
-          <a:bodyPr rtlCol="0" anchor="ctr"/>
-          <a:lstStyle/>
-          <a:p>
-            <a:pPr algn="ctr"/>
-            <a:r>
-              <a:rPr lang="en-US" dirty="0">
-                <a:latin typeface="Century Gothic" panose="020B0502020202020204" pitchFamily="34" charset="0"/>
-              </a:rPr>
-              <a:t>LLM Architecture Bias</a:t>
-            </a:r>
-          </a:p>
-        </p:txBody>
-      </p:sp>
-      <p:sp>
-        <p:nvSpPr>
-          <p:cNvPr id="11" name="Rectangle 10">
-            <a:extLst>
-              <a:ext uri="{FF2B5EF4-FFF2-40B4-BE49-F238E27FC236}">
-                <a16:creationId xmlns:a16="http://schemas.microsoft.com/office/drawing/2014/main" id="{1E97452B-0C86-EC1A-2B55-7AFED2CE88DF}"/>
-              </a:ext>
-            </a:extLst>
-          </p:cNvPr>
-          <p:cNvSpPr/>
-          <p:nvPr/>
-        </p:nvSpPr>
-        <p:spPr>
-          <a:xfrm>
-            <a:off x="8024677" y="2938338"/>
-            <a:ext cx="3117047" cy="992408"/>
-          </a:xfrm>
-          <a:prstGeom prst="rect">
-            <a:avLst/>
-          </a:prstGeom>
-          <a:solidFill>
-            <a:srgbClr val="FABB00">
-              <a:alpha val="23922"/>
-            </a:srgbClr>
-          </a:solidFill>
-          <a:ln>
-            <a:prstDash val="dash"/>
-          </a:ln>
-        </p:spPr>
-        <p:style>
-          <a:lnRef idx="2">
-            <a:schemeClr val="dk1"/>
-          </a:lnRef>
-          <a:fillRef idx="1">
-            <a:schemeClr val="lt1"/>
-          </a:fillRef>
-          <a:effectRef idx="0">
-            <a:schemeClr val="dk1"/>
-          </a:effectRef>
-          <a:fontRef idx="minor">
-            <a:schemeClr val="dk1"/>
-          </a:fontRef>
-        </p:style>
-        <p:txBody>
-          <a:bodyPr rtlCol="0" anchor="ctr"/>
-          <a:lstStyle/>
-          <a:p>
-            <a:pPr algn="ctr"/>
-            <a:r>
-              <a:rPr lang="en-US" dirty="0">
-                <a:latin typeface="Century Gothic" panose="020B0502020202020204" pitchFamily="34" charset="0"/>
-              </a:rPr>
-              <a:t>Probe Data Bias</a:t>
-            </a:r>
-          </a:p>
-        </p:txBody>
-      </p:sp>
-      <p:sp>
-        <p:nvSpPr>
-          <p:cNvPr id="12" name="Rectangle 11">
-            <a:extLst>
-              <a:ext uri="{FF2B5EF4-FFF2-40B4-BE49-F238E27FC236}">
-                <a16:creationId xmlns:a16="http://schemas.microsoft.com/office/drawing/2014/main" id="{8AC5B2F3-54CC-70BE-F29C-213DB8FEBF14}"/>
-              </a:ext>
-            </a:extLst>
-          </p:cNvPr>
-          <p:cNvSpPr/>
-          <p:nvPr/>
-        </p:nvSpPr>
-        <p:spPr>
-          <a:xfrm>
-            <a:off x="4660669" y="4226373"/>
-            <a:ext cx="3117047" cy="992408"/>
-          </a:xfrm>
-          <a:prstGeom prst="rect">
-            <a:avLst/>
-          </a:prstGeom>
-          <a:solidFill>
-            <a:srgbClr val="655A9F">
-              <a:alpha val="43000"/>
-            </a:srgbClr>
-          </a:solidFill>
-        </p:spPr>
-        <p:style>
-          <a:lnRef idx="2">
-            <a:schemeClr val="dk1"/>
-          </a:lnRef>
-          <a:fillRef idx="1">
-            <a:schemeClr val="lt1"/>
-          </a:fillRef>
-          <a:effectRef idx="0">
-            <a:schemeClr val="dk1"/>
-          </a:effectRef>
-          <a:fontRef idx="minor">
-            <a:schemeClr val="dk1"/>
-          </a:fontRef>
-        </p:style>
-        <p:txBody>
-          <a:bodyPr rtlCol="0" anchor="ctr"/>
-          <a:lstStyle/>
-          <a:p>
-            <a:pPr algn="ctr"/>
-            <a:r>
-              <a:rPr lang="en-US" dirty="0">
-                <a:latin typeface="Century Gothic" panose="020B0502020202020204" pitchFamily="34" charset="0"/>
-              </a:rPr>
-              <a:t>Probe</a:t>
-            </a:r>
-          </a:p>
-        </p:txBody>
-      </p:sp>
-      <p:sp>
-        <p:nvSpPr>
-          <p:cNvPr id="13" name="Rectangle 12">
-            <a:extLst>
-              <a:ext uri="{FF2B5EF4-FFF2-40B4-BE49-F238E27FC236}">
-                <a16:creationId xmlns:a16="http://schemas.microsoft.com/office/drawing/2014/main" id="{43836AFC-C87C-7461-9271-F17F6B529FA9}"/>
-              </a:ext>
-            </a:extLst>
-          </p:cNvPr>
-          <p:cNvSpPr/>
-          <p:nvPr/>
-        </p:nvSpPr>
-        <p:spPr>
-          <a:xfrm>
-            <a:off x="4660669" y="5514406"/>
-            <a:ext cx="3117047" cy="992408"/>
-          </a:xfrm>
-          <a:prstGeom prst="rect">
-            <a:avLst/>
-          </a:prstGeom>
-          <a:solidFill>
-            <a:srgbClr val="E2001A">
-              <a:alpha val="42000"/>
-            </a:srgbClr>
-          </a:solidFill>
-        </p:spPr>
-        <p:style>
-          <a:lnRef idx="2">
-            <a:schemeClr val="dk1"/>
-          </a:lnRef>
-          <a:fillRef idx="1">
-            <a:schemeClr val="lt1"/>
-          </a:fillRef>
-          <a:effectRef idx="0">
-            <a:schemeClr val="dk1"/>
-          </a:effectRef>
-          <a:fontRef idx="minor">
-            <a:schemeClr val="dk1"/>
-          </a:fontRef>
-        </p:style>
-        <p:txBody>
-          <a:bodyPr rtlCol="0" anchor="ctr"/>
-          <a:lstStyle/>
-          <a:p>
-            <a:pPr algn="ctr"/>
-            <a:r>
-              <a:rPr lang="en-US" dirty="0">
-                <a:latin typeface="Century Gothic" panose="020B0502020202020204" pitchFamily="34" charset="0"/>
-              </a:rPr>
-              <a:t>Prediction Error</a:t>
-            </a:r>
-          </a:p>
-        </p:txBody>
-      </p:sp>
-      <p:cxnSp>
-        <p:nvCxnSpPr>
-          <p:cNvPr id="17" name="Straight Arrow Connector 16">
-            <a:extLst>
-              <a:ext uri="{FF2B5EF4-FFF2-40B4-BE49-F238E27FC236}">
-                <a16:creationId xmlns:a16="http://schemas.microsoft.com/office/drawing/2014/main" id="{2C7D1383-53FC-7071-D111-7A1BAC574329}"/>
-              </a:ext>
-            </a:extLst>
-          </p:cNvPr>
-          <p:cNvCxnSpPr>
-            <a:stCxn id="9" idx="3"/>
-            <a:endCxn id="7" idx="1"/>
-          </p:cNvCxnSpPr>
-          <p:nvPr/>
-        </p:nvCxnSpPr>
-        <p:spPr>
-          <a:xfrm>
-            <a:off x="4388746" y="858976"/>
-            <a:ext cx="271924" cy="0"/>
-          </a:xfrm>
-          <a:prstGeom prst="straightConnector1">
-            <a:avLst/>
-          </a:prstGeom>
-          <a:ln>
-            <a:tailEnd type="triangle"/>
-          </a:ln>
-        </p:spPr>
-        <p:style>
-          <a:lnRef idx="2">
-            <a:schemeClr val="dk1"/>
-          </a:lnRef>
-          <a:fillRef idx="0">
-            <a:schemeClr val="dk1"/>
-          </a:fillRef>
-          <a:effectRef idx="1">
-            <a:schemeClr val="dk1"/>
-          </a:effectRef>
-          <a:fontRef idx="minor">
-            <a:schemeClr val="tx1"/>
-          </a:fontRef>
-        </p:style>
-      </p:cxnSp>
-      <p:cxnSp>
-        <p:nvCxnSpPr>
-          <p:cNvPr id="18" name="Straight Arrow Connector 17">
-            <a:extLst>
-              <a:ext uri="{FF2B5EF4-FFF2-40B4-BE49-F238E27FC236}">
-                <a16:creationId xmlns:a16="http://schemas.microsoft.com/office/drawing/2014/main" id="{92026BFC-CAD5-0154-2AC2-3A351751D100}"/>
-              </a:ext>
-            </a:extLst>
-          </p:cNvPr>
-          <p:cNvCxnSpPr>
-            <a:cxnSpLocks/>
-            <a:stCxn id="7" idx="2"/>
-            <a:endCxn id="5" idx="0"/>
-          </p:cNvCxnSpPr>
-          <p:nvPr/>
-        </p:nvCxnSpPr>
-        <p:spPr>
-          <a:xfrm>
-            <a:off x="6219193" y="1355179"/>
-            <a:ext cx="0" cy="295626"/>
-          </a:xfrm>
-          <a:prstGeom prst="straightConnector1">
-            <a:avLst/>
-          </a:prstGeom>
-          <a:ln>
-            <a:tailEnd type="triangle"/>
-          </a:ln>
-        </p:spPr>
-        <p:style>
-          <a:lnRef idx="2">
-            <a:schemeClr val="dk1"/>
-          </a:lnRef>
-          <a:fillRef idx="0">
-            <a:schemeClr val="dk1"/>
-          </a:fillRef>
-          <a:effectRef idx="1">
-            <a:schemeClr val="dk1"/>
-          </a:effectRef>
-          <a:fontRef idx="minor">
-            <a:schemeClr val="tx1"/>
-          </a:fontRef>
-        </p:style>
-      </p:cxnSp>
-      <p:cxnSp>
-        <p:nvCxnSpPr>
-          <p:cNvPr id="21" name="Straight Arrow Connector 20">
-            <a:extLst>
-              <a:ext uri="{FF2B5EF4-FFF2-40B4-BE49-F238E27FC236}">
-                <a16:creationId xmlns:a16="http://schemas.microsoft.com/office/drawing/2014/main" id="{90AB3358-BD39-5B92-F218-9935AC3FECE0}"/>
-              </a:ext>
-            </a:extLst>
-          </p:cNvPr>
-          <p:cNvCxnSpPr>
-            <a:cxnSpLocks/>
-            <a:stCxn id="5" idx="2"/>
-            <a:endCxn id="12" idx="0"/>
-          </p:cNvCxnSpPr>
-          <p:nvPr/>
-        </p:nvCxnSpPr>
-        <p:spPr>
-          <a:xfrm>
-            <a:off x="6219193" y="2643212"/>
-            <a:ext cx="0" cy="1583161"/>
-          </a:xfrm>
-          <a:prstGeom prst="straightConnector1">
-            <a:avLst/>
-          </a:prstGeom>
-          <a:ln>
-            <a:tailEnd type="triangle"/>
-          </a:ln>
-        </p:spPr>
-        <p:style>
-          <a:lnRef idx="2">
-            <a:schemeClr val="dk1"/>
-          </a:lnRef>
-          <a:fillRef idx="0">
-            <a:schemeClr val="dk1"/>
-          </a:fillRef>
-          <a:effectRef idx="1">
-            <a:schemeClr val="dk1"/>
-          </a:effectRef>
-          <a:fontRef idx="minor">
-            <a:schemeClr val="tx1"/>
-          </a:fontRef>
-        </p:style>
-      </p:cxnSp>
-      <p:cxnSp>
-        <p:nvCxnSpPr>
-          <p:cNvPr id="24" name="Straight Arrow Connector 23">
-            <a:extLst>
-              <a:ext uri="{FF2B5EF4-FFF2-40B4-BE49-F238E27FC236}">
-                <a16:creationId xmlns:a16="http://schemas.microsoft.com/office/drawing/2014/main" id="{6D0FBBF9-6BF8-1A58-A545-1A84C29FB694}"/>
-              </a:ext>
-            </a:extLst>
-          </p:cNvPr>
-          <p:cNvCxnSpPr/>
-          <p:nvPr/>
-        </p:nvCxnSpPr>
-        <p:spPr>
-          <a:xfrm>
-            <a:off x="4388746" y="2166395"/>
-            <a:ext cx="271924" cy="0"/>
-          </a:xfrm>
-          <a:prstGeom prst="straightConnector1">
-            <a:avLst/>
-          </a:prstGeom>
-          <a:ln>
-            <a:tailEnd type="triangle"/>
-          </a:ln>
-        </p:spPr>
-        <p:style>
-          <a:lnRef idx="2">
-            <a:schemeClr val="dk1"/>
-          </a:lnRef>
-          <a:fillRef idx="0">
-            <a:schemeClr val="dk1"/>
-          </a:fillRef>
-          <a:effectRef idx="1">
-            <a:schemeClr val="dk1"/>
-          </a:effectRef>
-          <a:fontRef idx="minor">
-            <a:schemeClr val="tx1"/>
-          </a:fontRef>
-        </p:style>
-      </p:cxnSp>
-      <p:cxnSp>
-        <p:nvCxnSpPr>
-          <p:cNvPr id="25" name="Straight Arrow Connector 24">
-            <a:extLst>
-              <a:ext uri="{FF2B5EF4-FFF2-40B4-BE49-F238E27FC236}">
-                <a16:creationId xmlns:a16="http://schemas.microsoft.com/office/drawing/2014/main" id="{8F9E6FD1-8714-0EA2-BA75-71FA94676BB5}"/>
-              </a:ext>
-            </a:extLst>
-          </p:cNvPr>
-          <p:cNvCxnSpPr>
-            <a:cxnSpLocks/>
-            <a:stCxn id="11" idx="2"/>
-          </p:cNvCxnSpPr>
-          <p:nvPr/>
-        </p:nvCxnSpPr>
-        <p:spPr>
-          <a:xfrm>
-            <a:off x="9583201" y="3930746"/>
-            <a:ext cx="0" cy="295627"/>
-          </a:xfrm>
-          <a:prstGeom prst="straightConnector1">
-            <a:avLst/>
-          </a:prstGeom>
-          <a:ln>
-            <a:tailEnd type="triangle"/>
-          </a:ln>
-        </p:spPr>
-        <p:style>
-          <a:lnRef idx="2">
-            <a:schemeClr val="dk1"/>
-          </a:lnRef>
-          <a:fillRef idx="0">
-            <a:schemeClr val="dk1"/>
-          </a:fillRef>
-          <a:effectRef idx="1">
-            <a:schemeClr val="dk1"/>
-          </a:effectRef>
-          <a:fontRef idx="minor">
-            <a:schemeClr val="tx1"/>
-          </a:fontRef>
-        </p:style>
-      </p:cxnSp>
-      <p:cxnSp>
-        <p:nvCxnSpPr>
-          <p:cNvPr id="27" name="Straight Arrow Connector 26">
-            <a:extLst>
-              <a:ext uri="{FF2B5EF4-FFF2-40B4-BE49-F238E27FC236}">
-                <a16:creationId xmlns:a16="http://schemas.microsoft.com/office/drawing/2014/main" id="{50E8C217-7164-4E8F-8B31-D2A586FF7F8C}"/>
-              </a:ext>
-            </a:extLst>
-          </p:cNvPr>
-          <p:cNvCxnSpPr>
-            <a:cxnSpLocks/>
-          </p:cNvCxnSpPr>
-          <p:nvPr/>
-        </p:nvCxnSpPr>
-        <p:spPr>
-          <a:xfrm>
-            <a:off x="6219193" y="5218779"/>
-            <a:ext cx="0" cy="295627"/>
-          </a:xfrm>
-          <a:prstGeom prst="straightConnector1">
-            <a:avLst/>
-          </a:prstGeom>
-          <a:ln>
-            <a:tailEnd type="triangle"/>
-          </a:ln>
-        </p:spPr>
-        <p:style>
-          <a:lnRef idx="2">
-            <a:schemeClr val="dk1"/>
-          </a:lnRef>
-          <a:fillRef idx="0">
-            <a:schemeClr val="dk1"/>
-          </a:fillRef>
-          <a:effectRef idx="1">
-            <a:schemeClr val="dk1"/>
-          </a:effectRef>
-          <a:fontRef idx="minor">
-            <a:schemeClr val="tx1"/>
-          </a:fontRef>
-        </p:style>
-      </p:cxnSp>
-      <p:cxnSp>
-        <p:nvCxnSpPr>
-          <p:cNvPr id="29" name="Straight Arrow Connector 28">
-            <a:extLst>
-              <a:ext uri="{FF2B5EF4-FFF2-40B4-BE49-F238E27FC236}">
-                <a16:creationId xmlns:a16="http://schemas.microsoft.com/office/drawing/2014/main" id="{EDBEC616-48A2-75F5-05DA-FDB17B0A543F}"/>
-              </a:ext>
-            </a:extLst>
-          </p:cNvPr>
-          <p:cNvCxnSpPr>
-            <a:cxnSpLocks/>
-            <a:stCxn id="8" idx="1"/>
-            <a:endCxn id="12" idx="3"/>
-          </p:cNvCxnSpPr>
-          <p:nvPr/>
-        </p:nvCxnSpPr>
-        <p:spPr>
-          <a:xfrm flipH="1">
-            <a:off x="7777716" y="4722577"/>
-            <a:ext cx="246961" cy="0"/>
-          </a:xfrm>
-          <a:prstGeom prst="straightConnector1">
-            <a:avLst/>
-          </a:prstGeom>
-          <a:ln>
-            <a:tailEnd type="triangle"/>
-          </a:ln>
-        </p:spPr>
-        <p:style>
-          <a:lnRef idx="2">
-            <a:schemeClr val="dk1"/>
-          </a:lnRef>
-          <a:fillRef idx="0">
-            <a:schemeClr val="dk1"/>
-          </a:fillRef>
-          <a:effectRef idx="1">
-            <a:schemeClr val="dk1"/>
-          </a:effectRef>
-          <a:fontRef idx="minor">
-            <a:schemeClr val="tx1"/>
-          </a:fontRef>
-        </p:style>
-      </p:cxnSp>
-      <p:sp>
-        <p:nvSpPr>
-          <p:cNvPr id="34" name="Rectangle 33">
-            <a:extLst>
-              <a:ext uri="{FF2B5EF4-FFF2-40B4-BE49-F238E27FC236}">
-                <a16:creationId xmlns:a16="http://schemas.microsoft.com/office/drawing/2014/main" id="{6A2480DB-9A57-D9DC-E53F-B4F1DACC8262}"/>
-              </a:ext>
-            </a:extLst>
-          </p:cNvPr>
-          <p:cNvSpPr/>
-          <p:nvPr/>
-        </p:nvSpPr>
-        <p:spPr>
-          <a:xfrm>
-            <a:off x="8024677" y="5514406"/>
-            <a:ext cx="3117047" cy="992408"/>
-          </a:xfrm>
-          <a:prstGeom prst="rect">
-            <a:avLst/>
-          </a:prstGeom>
-          <a:solidFill>
-            <a:srgbClr val="FABB00">
-              <a:alpha val="54118"/>
-            </a:srgbClr>
-          </a:solidFill>
-        </p:spPr>
-        <p:style>
-          <a:lnRef idx="2">
-            <a:schemeClr val="dk1"/>
-          </a:lnRef>
-          <a:fillRef idx="1">
-            <a:schemeClr val="lt1"/>
-          </a:fillRef>
-          <a:effectRef idx="0">
-            <a:schemeClr val="dk1"/>
-          </a:effectRef>
-          <a:fontRef idx="minor">
-            <a:schemeClr val="dk1"/>
-          </a:fontRef>
-        </p:style>
-        <p:txBody>
-          <a:bodyPr rtlCol="0" anchor="ctr"/>
-          <a:lstStyle/>
-          <a:p>
-            <a:pPr algn="ctr"/>
-            <a:r>
-              <a:rPr lang="en-US" dirty="0">
-                <a:latin typeface="Century Gothic" panose="020B0502020202020204" pitchFamily="34" charset="0"/>
-              </a:rPr>
-              <a:t>Probe Test Data</a:t>
-            </a:r>
-          </a:p>
-        </p:txBody>
-      </p:sp>
-      <p:cxnSp>
-        <p:nvCxnSpPr>
-          <p:cNvPr id="35" name="Straight Arrow Connector 34">
-            <a:extLst>
-              <a:ext uri="{FF2B5EF4-FFF2-40B4-BE49-F238E27FC236}">
-                <a16:creationId xmlns:a16="http://schemas.microsoft.com/office/drawing/2014/main" id="{F9FB726A-2690-EE56-F9A8-1537C1A4C85E}"/>
-              </a:ext>
-            </a:extLst>
-          </p:cNvPr>
-          <p:cNvCxnSpPr>
-            <a:cxnSpLocks/>
-          </p:cNvCxnSpPr>
-          <p:nvPr/>
-        </p:nvCxnSpPr>
-        <p:spPr>
-          <a:xfrm flipH="1">
-            <a:off x="7777716" y="6010609"/>
-            <a:ext cx="246961" cy="0"/>
-          </a:xfrm>
-          <a:prstGeom prst="straightConnector1">
-            <a:avLst/>
-          </a:prstGeom>
-          <a:ln>
-            <a:tailEnd type="triangle"/>
-          </a:ln>
-        </p:spPr>
-        <p:style>
-          <a:lnRef idx="2">
-            <a:schemeClr val="dk1"/>
-          </a:lnRef>
-          <a:fillRef idx="0">
-            <a:schemeClr val="dk1"/>
-          </a:fillRef>
-          <a:effectRef idx="1">
-            <a:schemeClr val="dk1"/>
-          </a:effectRef>
-          <a:fontRef idx="minor">
-            <a:schemeClr val="tx1"/>
-          </a:fontRef>
-        </p:style>
-      </p:cxnSp>
-      <p:cxnSp>
-        <p:nvCxnSpPr>
-          <p:cNvPr id="50" name="Straight Arrow Connector 49">
-            <a:extLst>
-              <a:ext uri="{FF2B5EF4-FFF2-40B4-BE49-F238E27FC236}">
-                <a16:creationId xmlns:a16="http://schemas.microsoft.com/office/drawing/2014/main" id="{545D6087-BC22-D0D9-9586-498503A134AA}"/>
-              </a:ext>
-            </a:extLst>
-          </p:cNvPr>
-          <p:cNvCxnSpPr>
-            <a:cxnSpLocks/>
-          </p:cNvCxnSpPr>
-          <p:nvPr/>
-        </p:nvCxnSpPr>
-        <p:spPr>
-          <a:xfrm flipH="1">
-            <a:off x="11141724" y="6010609"/>
-            <a:ext cx="246961" cy="0"/>
-          </a:xfrm>
-          <a:prstGeom prst="straightConnector1">
-            <a:avLst/>
-          </a:prstGeom>
-          <a:ln>
-            <a:prstDash val="sysDot"/>
-            <a:tailEnd type="triangle"/>
-          </a:ln>
-        </p:spPr>
-        <p:style>
-          <a:lnRef idx="2">
-            <a:schemeClr val="dk1"/>
-          </a:lnRef>
-          <a:fillRef idx="0">
-            <a:schemeClr val="dk1"/>
-          </a:fillRef>
-          <a:effectRef idx="1">
-            <a:schemeClr val="dk1"/>
-          </a:effectRef>
-          <a:fontRef idx="minor">
-            <a:schemeClr val="tx1"/>
-          </a:fontRef>
-        </p:style>
-      </p:cxnSp>
-      <p:cxnSp>
-        <p:nvCxnSpPr>
-          <p:cNvPr id="51" name="Straight Arrow Connector 50">
-            <a:extLst>
-              <a:ext uri="{FF2B5EF4-FFF2-40B4-BE49-F238E27FC236}">
-                <a16:creationId xmlns:a16="http://schemas.microsoft.com/office/drawing/2014/main" id="{4FECD7D7-60F6-5821-5BDB-27FB849F3C2B}"/>
-              </a:ext>
-            </a:extLst>
-          </p:cNvPr>
-          <p:cNvCxnSpPr>
-            <a:cxnSpLocks/>
-          </p:cNvCxnSpPr>
-          <p:nvPr/>
-        </p:nvCxnSpPr>
-        <p:spPr>
-          <a:xfrm flipH="1">
-            <a:off x="11141724" y="3427487"/>
-            <a:ext cx="246961" cy="0"/>
-          </a:xfrm>
-          <a:prstGeom prst="straightConnector1">
-            <a:avLst/>
-          </a:prstGeom>
-          <a:ln>
-            <a:prstDash val="sysDot"/>
-            <a:headEnd type="none" w="med" len="med"/>
-            <a:tailEnd type="none" w="med" len="med"/>
-          </a:ln>
-        </p:spPr>
-        <p:style>
-          <a:lnRef idx="2">
-            <a:schemeClr val="dk1"/>
-          </a:lnRef>
-          <a:fillRef idx="0">
-            <a:schemeClr val="dk1"/>
-          </a:fillRef>
-          <a:effectRef idx="1">
-            <a:schemeClr val="dk1"/>
-          </a:effectRef>
-          <a:fontRef idx="minor">
-            <a:schemeClr val="tx1"/>
-          </a:fontRef>
-        </p:style>
-      </p:cxnSp>
-      <p:cxnSp>
-        <p:nvCxnSpPr>
-          <p:cNvPr id="52" name="Straight Arrow Connector 51">
-            <a:extLst>
-              <a:ext uri="{FF2B5EF4-FFF2-40B4-BE49-F238E27FC236}">
-                <a16:creationId xmlns:a16="http://schemas.microsoft.com/office/drawing/2014/main" id="{60E1A640-D67F-9D83-ED76-67AD87B4C23E}"/>
-              </a:ext>
-            </a:extLst>
-          </p:cNvPr>
-          <p:cNvCxnSpPr>
-            <a:cxnSpLocks/>
-          </p:cNvCxnSpPr>
-          <p:nvPr/>
-        </p:nvCxnSpPr>
-        <p:spPr>
-          <a:xfrm>
-            <a:off x="11420458" y="3427487"/>
-            <a:ext cx="0" cy="2583122"/>
-          </a:xfrm>
-          <a:prstGeom prst="straightConnector1">
-            <a:avLst/>
-          </a:prstGeom>
-          <a:ln>
-            <a:prstDash val="sysDot"/>
-            <a:headEnd type="none" w="med" len="med"/>
-            <a:tailEnd type="none" w="med" len="med"/>
-          </a:ln>
-        </p:spPr>
-        <p:style>
-          <a:lnRef idx="2">
-            <a:schemeClr val="dk1"/>
-          </a:lnRef>
-          <a:fillRef idx="0">
-            <a:schemeClr val="dk1"/>
-          </a:fillRef>
-          <a:effectRef idx="1">
-            <a:schemeClr val="dk1"/>
-          </a:effectRef>
-          <a:fontRef idx="minor">
-            <a:schemeClr val="tx1"/>
-          </a:fontRef>
-        </p:style>
-      </p:cxnSp>
-      <p:sp>
-        <p:nvSpPr>
-          <p:cNvPr id="56" name="Rectangle 55">
-            <a:extLst>
-              <a:ext uri="{FF2B5EF4-FFF2-40B4-BE49-F238E27FC236}">
-                <a16:creationId xmlns:a16="http://schemas.microsoft.com/office/drawing/2014/main" id="{5967F94C-576A-9AF4-0872-132F083583C0}"/>
-              </a:ext>
-            </a:extLst>
-          </p:cNvPr>
-          <p:cNvSpPr/>
-          <p:nvPr/>
-        </p:nvSpPr>
-        <p:spPr>
-          <a:xfrm>
-            <a:off x="8890618" y="455536"/>
-            <a:ext cx="210708" cy="207073"/>
-          </a:xfrm>
-          <a:prstGeom prst="rect">
-            <a:avLst/>
-          </a:prstGeom>
-          <a:solidFill>
-            <a:schemeClr val="accent6">
-              <a:lumMod val="20000"/>
-              <a:lumOff val="80000"/>
-            </a:schemeClr>
-          </a:solidFill>
-        </p:spPr>
-        <p:style>
-          <a:lnRef idx="2">
-            <a:schemeClr val="dk1"/>
-          </a:lnRef>
-          <a:fillRef idx="1">
-            <a:schemeClr val="lt1"/>
-          </a:fillRef>
-          <a:effectRef idx="0">
-            <a:schemeClr val="dk1"/>
-          </a:effectRef>
-          <a:fontRef idx="minor">
-            <a:schemeClr val="dk1"/>
-          </a:fontRef>
-        </p:style>
-        <p:txBody>
-          <a:bodyPr rtlCol="0" anchor="ctr"/>
-          <a:lstStyle/>
-          <a:p>
-            <a:pPr algn="ctr"/>
-            <a:endParaRPr lang="en-US" dirty="0">
-              <a:latin typeface="Century Gothic" panose="020B0502020202020204" pitchFamily="34" charset="0"/>
-            </a:endParaRPr>
-          </a:p>
-        </p:txBody>
-      </p:sp>
-      <p:sp>
-        <p:nvSpPr>
-          <p:cNvPr id="57" name="Content Placeholder 3">
-            <a:extLst>
-              <a:ext uri="{FF2B5EF4-FFF2-40B4-BE49-F238E27FC236}">
-                <a16:creationId xmlns:a16="http://schemas.microsoft.com/office/drawing/2014/main" id="{EAC3BF6E-1B94-E07E-BFEA-B8C64DC2852C}"/>
+        </p:spPr>
+      </p:pic>
+      <p:sp>
+        <p:nvSpPr>
+          <p:cNvPr id="17" name="Content Placeholder 3">
+            <a:extLst>
+              <a:ext uri="{FF2B5EF4-FFF2-40B4-BE49-F238E27FC236}">
+                <a16:creationId xmlns:a16="http://schemas.microsoft.com/office/drawing/2014/main" id="{4A0DF61E-8076-F5D8-19F8-7294F5B110AF}"/>
               </a:ext>
             </a:extLst>
           </p:cNvPr>
@@ -10330,8 +9504,8 @@
         </p:nvSpPr>
         <p:spPr>
           <a:xfrm>
-            <a:off x="9101326" y="425531"/>
-            <a:ext cx="3054625" cy="1363450"/>
+            <a:off x="375115" y="168906"/>
+            <a:ext cx="2776727" cy="341632"/>
           </a:xfrm>
           <a:prstGeom prst="rect">
             <a:avLst/>
@@ -10507,80 +9681,106 @@
             </a:lvl9pPr>
           </a:lstStyle>
           <a:p>
-            <a:pPr marL="0" indent="0">
+            <a:pPr marL="0" indent="0" algn="ctr">
               <a:buFont typeface="Arial" panose="020B0604020202020204" pitchFamily="34" charset="0"/>
               <a:buNone/>
             </a:pPr>
             <a:r>
-              <a:rPr lang="en-US" sz="1600" dirty="0">
+              <a:rPr lang="en-US" sz="1800" b="1" dirty="0">
                 <a:latin typeface="Century Gothic" panose="020B0502020202020204" pitchFamily="34" charset="0"/>
               </a:rPr>
-              <a:t>= Large Language Model</a:t>
-            </a:r>
-          </a:p>
-          <a:p>
-            <a:pPr marL="0" indent="0">
-              <a:buFont typeface="Arial" panose="020B0604020202020204" pitchFamily="34" charset="0"/>
-              <a:buNone/>
-            </a:pPr>
-            <a:r>
-              <a:rPr lang="en-US" sz="1600" dirty="0">
-                <a:latin typeface="Century Gothic" panose="020B0502020202020204" pitchFamily="34" charset="0"/>
-              </a:rPr>
-              <a:t>= Probe Architecture</a:t>
-            </a:r>
-          </a:p>
-          <a:p>
-            <a:pPr marL="0" indent="0">
-              <a:buFont typeface="Arial" panose="020B0604020202020204" pitchFamily="34" charset="0"/>
-              <a:buNone/>
-            </a:pPr>
-            <a:r>
-              <a:rPr lang="en-US" sz="1600" dirty="0">
-                <a:latin typeface="Century Gothic" panose="020B0502020202020204" pitchFamily="34" charset="0"/>
-              </a:rPr>
-              <a:t>= Data Distribution</a:t>
-            </a:r>
-          </a:p>
-          <a:p>
-            <a:pPr marL="0" indent="0">
-              <a:buFont typeface="Arial" panose="020B0604020202020204" pitchFamily="34" charset="0"/>
-              <a:buNone/>
-            </a:pPr>
-            <a:r>
-              <a:rPr lang="en-US" sz="1600" dirty="0">
-                <a:latin typeface="Century Gothic" panose="020B0502020202020204" pitchFamily="34" charset="0"/>
-              </a:rPr>
-              <a:t>= All Variables</a:t>
+              <a:t>Language Models</a:t>
             </a:r>
           </a:p>
         </p:txBody>
       </p:sp>
-      <p:sp>
-        <p:nvSpPr>
-          <p:cNvPr id="58" name="Rectangle 57">
-            <a:extLst>
-              <a:ext uri="{FF2B5EF4-FFF2-40B4-BE49-F238E27FC236}">
-                <a16:creationId xmlns:a16="http://schemas.microsoft.com/office/drawing/2014/main" id="{9C385FEA-41EB-B10C-A04A-ADD42A10C4DA}"/>
-              </a:ext>
-            </a:extLst>
-          </p:cNvPr>
-          <p:cNvSpPr/>
+      <p:pic>
+        <p:nvPicPr>
+          <p:cNvPr id="26" name="Graphic 25">
+            <a:extLst>
+              <a:ext uri="{FF2B5EF4-FFF2-40B4-BE49-F238E27FC236}">
+                <a16:creationId xmlns:a16="http://schemas.microsoft.com/office/drawing/2014/main" id="{2C0000DF-252F-8532-F7EB-EBF4915C4128}"/>
+              </a:ext>
+            </a:extLst>
+          </p:cNvPr>
+          <p:cNvPicPr>
+            <a:picLocks noChangeAspect="1"/>
+          </p:cNvPicPr>
           <p:nvPr/>
-        </p:nvSpPr>
+        </p:nvPicPr>
+        <p:blipFill>
+          <a:blip>
+            <a:extLst>
+              <a:ext uri="{96DAC541-7B7A-43D3-8B79-37D633B846F1}">
+                <asvg:svgBlip xmlns:asvg="http://schemas.microsoft.com/office/drawing/2016/SVG/main" r:embed="rId11"/>
+              </a:ext>
+            </a:extLst>
+          </a:blip>
+          <a:stretch>
+            <a:fillRect/>
+          </a:stretch>
+        </p:blipFill>
         <p:spPr>
           <a:xfrm>
-            <a:off x="8890618" y="805966"/>
-            <a:ext cx="210708" cy="207073"/>
+            <a:off x="389554" y="133279"/>
+            <a:ext cx="341967" cy="325908"/>
           </a:xfrm>
           <a:prstGeom prst="rect">
             <a:avLst/>
           </a:prstGeom>
-          <a:solidFill>
-            <a:srgbClr val="655A9F">
-              <a:alpha val="43000"/>
-            </a:srgbClr>
-          </a:solidFill>
+        </p:spPr>
+      </p:pic>
+      <p:pic>
+        <p:nvPicPr>
+          <p:cNvPr id="30" name="Picture 29">
+            <a:extLst>
+              <a:ext uri="{FF2B5EF4-FFF2-40B4-BE49-F238E27FC236}">
+                <a16:creationId xmlns:a16="http://schemas.microsoft.com/office/drawing/2014/main" id="{0C3F6E1E-6BEB-CC97-E88C-701BC6631B2B}"/>
+              </a:ext>
+            </a:extLst>
+          </p:cNvPr>
+          <p:cNvPicPr>
+            <a:picLocks noChangeAspect="1"/>
+          </p:cNvPicPr>
+          <p:nvPr/>
+        </p:nvPicPr>
+        <p:blipFill>
+          <a:blip r:embed="rId3"/>
+          <a:srcRect l="29724" t="21896" r="63583" b="49400"/>
+          <a:stretch>
+            <a:fillRect/>
+          </a:stretch>
+        </p:blipFill>
+        <p:spPr>
+          <a:xfrm>
+            <a:off x="3116675" y="880379"/>
+            <a:ext cx="701193" cy="2125083"/>
+          </a:xfrm>
+          <a:prstGeom prst="rect">
+            <a:avLst/>
+          </a:prstGeom>
+        </p:spPr>
+      </p:pic>
+      <p:sp>
+        <p:nvSpPr>
+          <p:cNvPr id="18" name="Rectangle 17">
+            <a:extLst>
+              <a:ext uri="{FF2B5EF4-FFF2-40B4-BE49-F238E27FC236}">
+                <a16:creationId xmlns:a16="http://schemas.microsoft.com/office/drawing/2014/main" id="{B2D73612-D8E6-2F2A-0195-8932F3D33B0D}"/>
+              </a:ext>
+            </a:extLst>
+          </p:cNvPr>
+          <p:cNvSpPr/>
+          <p:nvPr/>
+        </p:nvSpPr>
+        <p:spPr>
+          <a:xfrm>
+            <a:off x="389554" y="475451"/>
+            <a:ext cx="2776727" cy="1476179"/>
+          </a:xfrm>
+          <a:prstGeom prst="rect">
+            <a:avLst/>
+          </a:prstGeom>
         </p:spPr>
         <p:style>
           <a:lnRef idx="2">
@@ -10600,119 +9800,95 @@
           <a:bodyPr rtlCol="0" anchor="ctr"/>
           <a:lstStyle/>
           <a:p>
-            <a:pPr algn="ctr"/>
-            <a:endParaRPr lang="en-US" dirty="0">
-              <a:latin typeface="Century Gothic" panose="020B0502020202020204" pitchFamily="34" charset="0"/>
-            </a:endParaRPr>
-          </a:p>
-        </p:txBody>
-      </p:sp>
-      <p:sp>
-        <p:nvSpPr>
-          <p:cNvPr id="59" name="Rectangle 58">
-            <a:extLst>
-              <a:ext uri="{FF2B5EF4-FFF2-40B4-BE49-F238E27FC236}">
-                <a16:creationId xmlns:a16="http://schemas.microsoft.com/office/drawing/2014/main" id="{D36A9FD5-E173-56F1-2DBE-D32B48959B8D}"/>
-              </a:ext>
-            </a:extLst>
-          </p:cNvPr>
-          <p:cNvSpPr/>
-          <p:nvPr/>
-        </p:nvSpPr>
-        <p:spPr>
-          <a:xfrm>
-            <a:off x="8890618" y="1156396"/>
-            <a:ext cx="210708" cy="207073"/>
-          </a:xfrm>
-          <a:prstGeom prst="rect">
-            <a:avLst/>
-          </a:prstGeom>
-          <a:solidFill>
-            <a:srgbClr val="FABB00">
-              <a:alpha val="54118"/>
-            </a:srgbClr>
-          </a:solidFill>
-        </p:spPr>
-        <p:style>
-          <a:lnRef idx="2">
-            <a:schemeClr val="dk1"/>
-          </a:lnRef>
-          <a:fillRef idx="1">
-            <a:schemeClr val="lt1"/>
-          </a:fillRef>
-          <a:effectRef idx="0">
-            <a:schemeClr val="dk1"/>
-          </a:effectRef>
-          <a:fontRef idx="minor">
-            <a:schemeClr val="dk1"/>
-          </a:fontRef>
-        </p:style>
-        <p:txBody>
-          <a:bodyPr rtlCol="0" anchor="ctr"/>
-          <a:lstStyle/>
-          <a:p>
-            <a:pPr algn="ctr"/>
-            <a:endParaRPr lang="en-US" dirty="0">
-              <a:latin typeface="Century Gothic" panose="020B0502020202020204" pitchFamily="34" charset="0"/>
-            </a:endParaRPr>
-          </a:p>
-        </p:txBody>
-      </p:sp>
-      <p:sp>
-        <p:nvSpPr>
-          <p:cNvPr id="60" name="Rectangle 59">
-            <a:extLst>
-              <a:ext uri="{FF2B5EF4-FFF2-40B4-BE49-F238E27FC236}">
-                <a16:creationId xmlns:a16="http://schemas.microsoft.com/office/drawing/2014/main" id="{9A25FBBB-1834-9FD5-7A54-E393B677CEEC}"/>
-              </a:ext>
-            </a:extLst>
-          </p:cNvPr>
-          <p:cNvSpPr/>
-          <p:nvPr/>
-        </p:nvSpPr>
-        <p:spPr>
-          <a:xfrm>
-            <a:off x="8890618" y="1502992"/>
-            <a:ext cx="210708" cy="207073"/>
-          </a:xfrm>
-          <a:prstGeom prst="rect">
-            <a:avLst/>
-          </a:prstGeom>
-          <a:solidFill>
-            <a:srgbClr val="E2001A">
-              <a:alpha val="42000"/>
-            </a:srgbClr>
-          </a:solidFill>
-        </p:spPr>
-        <p:style>
-          <a:lnRef idx="2">
-            <a:schemeClr val="dk1"/>
-          </a:lnRef>
-          <a:fillRef idx="1">
-            <a:schemeClr val="lt1"/>
-          </a:fillRef>
-          <a:effectRef idx="0">
-            <a:schemeClr val="dk1"/>
-          </a:effectRef>
-          <a:fontRef idx="minor">
-            <a:schemeClr val="dk1"/>
-          </a:fontRef>
-        </p:style>
-        <p:txBody>
-          <a:bodyPr rtlCol="0" anchor="ctr"/>
-          <a:lstStyle/>
-          <a:p>
-            <a:pPr algn="ctr"/>
-            <a:endParaRPr lang="en-US" dirty="0">
-              <a:latin typeface="Century Gothic" panose="020B0502020202020204" pitchFamily="34" charset="0"/>
-            </a:endParaRPr>
+            <a:pPr marL="171450" indent="-171450">
+              <a:buFontTx/>
+              <a:buChar char="-"/>
+            </a:pPr>
+            <a:r>
+              <a:rPr lang="en-US" sz="1200" dirty="0">
+                <a:latin typeface="Century Gothic" panose="020B0502020202020204" pitchFamily="34" charset="0"/>
+              </a:rPr>
+              <a:t>Qwen3-Embedding-0.6B</a:t>
+            </a:r>
+          </a:p>
+          <a:p>
+            <a:pPr marL="171450" indent="-171450">
+              <a:buFontTx/>
+              <a:buChar char="-"/>
+            </a:pPr>
+            <a:r>
+              <a:rPr lang="en-US" sz="1200" dirty="0">
+                <a:latin typeface="Century Gothic" panose="020B0502020202020204" pitchFamily="34" charset="0"/>
+              </a:rPr>
+              <a:t>Qwen3-Embedding-4B</a:t>
+            </a:r>
+          </a:p>
+          <a:p>
+            <a:pPr marL="171450" indent="-171450">
+              <a:buFontTx/>
+              <a:buChar char="-"/>
+            </a:pPr>
+            <a:r>
+              <a:rPr lang="en-US" sz="1200" dirty="0">
+                <a:latin typeface="Century Gothic" panose="020B0502020202020204" pitchFamily="34" charset="0"/>
+              </a:rPr>
+              <a:t>Qwen3-Embedding-8B</a:t>
+            </a:r>
+          </a:p>
+          <a:p>
+            <a:pPr marL="171450" indent="-171450">
+              <a:buFontTx/>
+              <a:buChar char="-"/>
+            </a:pPr>
+            <a:r>
+              <a:rPr lang="en-US" sz="1200" dirty="0">
+                <a:latin typeface="Century Gothic" panose="020B0502020202020204" pitchFamily="34" charset="0"/>
+              </a:rPr>
+              <a:t>Google-Gemma-0.3B</a:t>
+            </a:r>
+          </a:p>
+          <a:p>
+            <a:pPr marL="171450" indent="-171450">
+              <a:buFontTx/>
+              <a:buChar char="-"/>
+            </a:pPr>
+            <a:r>
+              <a:rPr lang="en-US" sz="1200" dirty="0">
+                <a:latin typeface="Century Gothic" panose="020B0502020202020204" pitchFamily="34" charset="0"/>
+              </a:rPr>
+              <a:t>Intfloat-E5-Large-0.6B</a:t>
+            </a:r>
+          </a:p>
+          <a:p>
+            <a:pPr marL="171450" indent="-171450">
+              <a:buFontTx/>
+              <a:buChar char="-"/>
+            </a:pPr>
+            <a:r>
+              <a:rPr lang="en-US" sz="1200" dirty="0">
+                <a:latin typeface="Century Gothic" panose="020B0502020202020204" pitchFamily="34" charset="0"/>
+              </a:rPr>
+              <a:t>Intfloat-E5-Mistral-7B</a:t>
+            </a:r>
+          </a:p>
+          <a:p>
+            <a:pPr marL="171450" indent="-171450">
+              <a:buFontTx/>
+              <a:buChar char="-"/>
+            </a:pPr>
+            <a:r>
+              <a:rPr lang="en-US" sz="1200" dirty="0">
+                <a:latin typeface="Century Gothic" panose="020B0502020202020204" pitchFamily="34" charset="0"/>
+              </a:rPr>
+              <a:t>Nvidia-Llama-Nemotron-8B</a:t>
+            </a:r>
           </a:p>
         </p:txBody>
       </p:sp>
     </p:spTree>
     <p:extLst>
       <p:ext uri="{BB962C8B-B14F-4D97-AF65-F5344CB8AC3E}">
-        <p14:creationId xmlns:p14="http://schemas.microsoft.com/office/powerpoint/2010/main" val="1348204213"/>
+        <p14:creationId xmlns:p14="http://schemas.microsoft.com/office/powerpoint/2010/main" val="319037333"/>
       </p:ext>
     </p:extLst>
   </p:cSld>
@@ -10722,18 +9898,12 @@
 </p:sld>
 </file>
 
-<file path=ppt/slides/slide7.xml><?xml version="1.0" encoding="utf-8"?>
+<file path=ppt/slides/slide6.xml><?xml version="1.0" encoding="utf-8"?>
 <p:sld xmlns:a="http://schemas.openxmlformats.org/drawingml/2006/main" xmlns:r="http://schemas.openxmlformats.org/officeDocument/2006/relationships" xmlns:p="http://schemas.openxmlformats.org/presentationml/2006/main">
   <p:cSld>
     <p:spTree>
       <p:nvGrpSpPr>
-        <p:cNvPr id="1" name="">
-          <a:extLst>
-            <a:ext uri="{FF2B5EF4-FFF2-40B4-BE49-F238E27FC236}">
-              <a16:creationId xmlns:a16="http://schemas.microsoft.com/office/drawing/2014/main" id="{532C6D35-4119-E455-876F-E402CE7BE00B}"/>
-            </a:ext>
-          </a:extLst>
-        </p:cNvPr>
+        <p:cNvPr id="1" name=""/>
         <p:cNvGrpSpPr/>
         <p:nvPr/>
       </p:nvGrpSpPr>
@@ -10750,7 +9920,7 @@
           <p:cNvPr id="5" name="Rectangle 4">
             <a:extLst>
               <a:ext uri="{FF2B5EF4-FFF2-40B4-BE49-F238E27FC236}">
-                <a16:creationId xmlns:a16="http://schemas.microsoft.com/office/drawing/2014/main" id="{D43E09F5-BA74-9A10-BEEB-9E62110BF67B}"/>
+                <a16:creationId xmlns:a16="http://schemas.microsoft.com/office/drawing/2014/main" id="{36B51899-C836-D343-D530-6495C7BD34B0}"/>
               </a:ext>
             </a:extLst>
           </p:cNvPr>
@@ -10805,7 +9975,7 @@
           <p:cNvPr id="7" name="Rectangle 6">
             <a:extLst>
               <a:ext uri="{FF2B5EF4-FFF2-40B4-BE49-F238E27FC236}">
-                <a16:creationId xmlns:a16="http://schemas.microsoft.com/office/drawing/2014/main" id="{F1059DBB-199E-E6E4-DB68-E789D61C7AF9}"/>
+                <a16:creationId xmlns:a16="http://schemas.microsoft.com/office/drawing/2014/main" id="{1ED5378E-C288-58E0-62C0-1C6989F1C6C7}"/>
               </a:ext>
             </a:extLst>
           </p:cNvPr>
@@ -10860,7 +10030,7 @@
           <p:cNvPr id="8" name="Rectangle 7">
             <a:extLst>
               <a:ext uri="{FF2B5EF4-FFF2-40B4-BE49-F238E27FC236}">
-                <a16:creationId xmlns:a16="http://schemas.microsoft.com/office/drawing/2014/main" id="{9F2E7D84-0F21-F3B3-29D9-88EF3DB9252D}"/>
+                <a16:creationId xmlns:a16="http://schemas.microsoft.com/office/drawing/2014/main" id="{7AEE06E3-7A5A-DFA7-B93F-C84E37A3E167}"/>
               </a:ext>
             </a:extLst>
           </p:cNvPr>
@@ -10914,7 +10084,7 @@
           <p:cNvPr id="9" name="Rectangle 8">
             <a:extLst>
               <a:ext uri="{FF2B5EF4-FFF2-40B4-BE49-F238E27FC236}">
-                <a16:creationId xmlns:a16="http://schemas.microsoft.com/office/drawing/2014/main" id="{651A86B2-8EED-9905-279A-34B0C8DE3F0E}"/>
+                <a16:creationId xmlns:a16="http://schemas.microsoft.com/office/drawing/2014/main" id="{C79FF67E-06E5-B06B-27CC-7F5F93F16053}"/>
               </a:ext>
             </a:extLst>
           </p:cNvPr>
@@ -10971,7 +10141,7 @@
           <p:cNvPr id="10" name="Rectangle 9">
             <a:extLst>
               <a:ext uri="{FF2B5EF4-FFF2-40B4-BE49-F238E27FC236}">
-                <a16:creationId xmlns:a16="http://schemas.microsoft.com/office/drawing/2014/main" id="{F7A9C98A-EFC6-9C14-6097-C8465EF91B36}"/>
+                <a16:creationId xmlns:a16="http://schemas.microsoft.com/office/drawing/2014/main" id="{7899B159-D439-3F25-880E-7039CB958E0F}"/>
               </a:ext>
             </a:extLst>
           </p:cNvPr>
@@ -11028,7 +10198,7 @@
           <p:cNvPr id="11" name="Rectangle 10">
             <a:extLst>
               <a:ext uri="{FF2B5EF4-FFF2-40B4-BE49-F238E27FC236}">
-                <a16:creationId xmlns:a16="http://schemas.microsoft.com/office/drawing/2014/main" id="{BCE5940A-3974-5791-7FE9-9C067BD05AFF}"/>
+                <a16:creationId xmlns:a16="http://schemas.microsoft.com/office/drawing/2014/main" id="{1E97452B-0C86-EC1A-2B55-7AFED2CE88DF}"/>
               </a:ext>
             </a:extLst>
           </p:cNvPr>
@@ -11075,7 +10245,7 @@
               <a:rPr lang="en-US" dirty="0">
                 <a:latin typeface="Century Gothic" panose="020B0502020202020204" pitchFamily="34" charset="0"/>
               </a:rPr>
-              <a:t>Corpus Topic Confound</a:t>
+              <a:t>Probe Data Bias</a:t>
             </a:r>
           </a:p>
         </p:txBody>
@@ -11085,7 +10255,7 @@
           <p:cNvPr id="12" name="Rectangle 11">
             <a:extLst>
               <a:ext uri="{FF2B5EF4-FFF2-40B4-BE49-F238E27FC236}">
-                <a16:creationId xmlns:a16="http://schemas.microsoft.com/office/drawing/2014/main" id="{A3E08648-E8F8-885B-D766-CC39E040E1C9}"/>
+                <a16:creationId xmlns:a16="http://schemas.microsoft.com/office/drawing/2014/main" id="{8AC5B2F3-54CC-70BE-F29C-213DB8FEBF14}"/>
               </a:ext>
             </a:extLst>
           </p:cNvPr>
@@ -11139,7 +10309,7 @@
           <p:cNvPr id="13" name="Rectangle 12">
             <a:extLst>
               <a:ext uri="{FF2B5EF4-FFF2-40B4-BE49-F238E27FC236}">
-                <a16:creationId xmlns:a16="http://schemas.microsoft.com/office/drawing/2014/main" id="{87CBC2D6-C43A-EBA7-822B-FA3A13B7D80A}"/>
+                <a16:creationId xmlns:a16="http://schemas.microsoft.com/office/drawing/2014/main" id="{43836AFC-C87C-7461-9271-F17F6B529FA9}"/>
               </a:ext>
             </a:extLst>
           </p:cNvPr>
@@ -11188,126 +10358,12 @@
           </a:p>
         </p:txBody>
       </p:sp>
-      <p:sp>
-        <p:nvSpPr>
-          <p:cNvPr id="14" name="Rectangle 13">
-            <a:extLst>
-              <a:ext uri="{FF2B5EF4-FFF2-40B4-BE49-F238E27FC236}">
-                <a16:creationId xmlns:a16="http://schemas.microsoft.com/office/drawing/2014/main" id="{900BC281-E1A0-E034-CF74-9799CECBCB25}"/>
-              </a:ext>
-            </a:extLst>
-          </p:cNvPr>
-          <p:cNvSpPr/>
-          <p:nvPr/>
-        </p:nvSpPr>
-        <p:spPr>
-          <a:xfrm>
-            <a:off x="1110267" y="4226373"/>
-            <a:ext cx="3278477" cy="992408"/>
-          </a:xfrm>
-          <a:prstGeom prst="rect">
-            <a:avLst/>
-          </a:prstGeom>
-          <a:solidFill>
-            <a:srgbClr val="655A9F">
-              <a:alpha val="21747"/>
-            </a:srgbClr>
-          </a:solidFill>
-          <a:ln>
-            <a:prstDash val="dash"/>
-          </a:ln>
-        </p:spPr>
-        <p:style>
-          <a:lnRef idx="2">
-            <a:schemeClr val="dk1"/>
-          </a:lnRef>
-          <a:fillRef idx="1">
-            <a:schemeClr val="lt1"/>
-          </a:fillRef>
-          <a:effectRef idx="0">
-            <a:schemeClr val="dk1"/>
-          </a:effectRef>
-          <a:fontRef idx="minor">
-            <a:schemeClr val="dk1"/>
-          </a:fontRef>
-        </p:style>
-        <p:txBody>
-          <a:bodyPr rtlCol="0" anchor="ctr"/>
-          <a:lstStyle/>
-          <a:p>
-            <a:pPr algn="ctr"/>
-            <a:r>
-              <a:rPr lang="en-US" dirty="0">
-                <a:latin typeface="Century Gothic" panose="020B0502020202020204" pitchFamily="34" charset="0"/>
-              </a:rPr>
-              <a:t>Probe Architecture Bias</a:t>
-            </a:r>
-          </a:p>
-        </p:txBody>
-      </p:sp>
-      <p:sp>
-        <p:nvSpPr>
-          <p:cNvPr id="15" name="Rectangle 14">
-            <a:extLst>
-              <a:ext uri="{FF2B5EF4-FFF2-40B4-BE49-F238E27FC236}">
-                <a16:creationId xmlns:a16="http://schemas.microsoft.com/office/drawing/2014/main" id="{DCA39793-5BAC-8B23-61A7-90038631FBE5}"/>
-              </a:ext>
-            </a:extLst>
-          </p:cNvPr>
-          <p:cNvSpPr/>
-          <p:nvPr/>
-        </p:nvSpPr>
-        <p:spPr>
-          <a:xfrm>
-            <a:off x="1110268" y="2938338"/>
-            <a:ext cx="3278476" cy="992408"/>
-          </a:xfrm>
-          <a:prstGeom prst="rect">
-            <a:avLst/>
-          </a:prstGeom>
-          <a:solidFill>
-            <a:srgbClr val="D9F2D0">
-              <a:alpha val="52941"/>
-            </a:srgbClr>
-          </a:solidFill>
-          <a:ln>
-            <a:prstDash val="dash"/>
-          </a:ln>
-        </p:spPr>
-        <p:style>
-          <a:lnRef idx="2">
-            <a:schemeClr val="dk1"/>
-          </a:lnRef>
-          <a:fillRef idx="1">
-            <a:schemeClr val="lt1"/>
-          </a:fillRef>
-          <a:effectRef idx="0">
-            <a:schemeClr val="dk1"/>
-          </a:effectRef>
-          <a:fontRef idx="minor">
-            <a:schemeClr val="dk1"/>
-          </a:fontRef>
-        </p:style>
-        <p:txBody>
-          <a:bodyPr rtlCol="0" anchor="ctr"/>
-          <a:lstStyle/>
-          <a:p>
-            <a:pPr algn="ctr"/>
-            <a:r>
-              <a:rPr lang="en-US" dirty="0">
-                <a:latin typeface="Century Gothic" panose="020B0502020202020204" pitchFamily="34" charset="0"/>
-              </a:rPr>
-              <a:t>LLM Bias</a:t>
-            </a:r>
-          </a:p>
-        </p:txBody>
-      </p:sp>
       <p:cxnSp>
         <p:nvCxnSpPr>
           <p:cNvPr id="17" name="Straight Arrow Connector 16">
             <a:extLst>
               <a:ext uri="{FF2B5EF4-FFF2-40B4-BE49-F238E27FC236}">
-                <a16:creationId xmlns:a16="http://schemas.microsoft.com/office/drawing/2014/main" id="{541444C9-6EB6-7AC4-B167-02B02F7CAC62}"/>
+                <a16:creationId xmlns:a16="http://schemas.microsoft.com/office/drawing/2014/main" id="{2C7D1383-53FC-7071-D111-7A1BAC574329}"/>
               </a:ext>
             </a:extLst>
           </p:cNvPr>
@@ -11349,7 +10405,7 @@
           <p:cNvPr id="18" name="Straight Arrow Connector 17">
             <a:extLst>
               <a:ext uri="{FF2B5EF4-FFF2-40B4-BE49-F238E27FC236}">
-                <a16:creationId xmlns:a16="http://schemas.microsoft.com/office/drawing/2014/main" id="{DA757E2F-0B97-275F-C103-B1F47CACFEB9}"/>
+                <a16:creationId xmlns:a16="http://schemas.microsoft.com/office/drawing/2014/main" id="{92026BFC-CAD5-0154-2AC2-3A351751D100}"/>
               </a:ext>
             </a:extLst>
           </p:cNvPr>
@@ -11392,7 +10448,7 @@
           <p:cNvPr id="21" name="Straight Arrow Connector 20">
             <a:extLst>
               <a:ext uri="{FF2B5EF4-FFF2-40B4-BE49-F238E27FC236}">
-                <a16:creationId xmlns:a16="http://schemas.microsoft.com/office/drawing/2014/main" id="{A5FC008F-D319-4876-A03B-BE5E894EF704}"/>
+                <a16:creationId xmlns:a16="http://schemas.microsoft.com/office/drawing/2014/main" id="{90AB3358-BD39-5B92-F218-9935AC3FECE0}"/>
               </a:ext>
             </a:extLst>
           </p:cNvPr>
@@ -11435,7 +10491,7 @@
           <p:cNvPr id="24" name="Straight Arrow Connector 23">
             <a:extLst>
               <a:ext uri="{FF2B5EF4-FFF2-40B4-BE49-F238E27FC236}">
-                <a16:creationId xmlns:a16="http://schemas.microsoft.com/office/drawing/2014/main" id="{5F53F4A7-2B3B-6CED-C286-1AF47AD66587}"/>
+                <a16:creationId xmlns:a16="http://schemas.microsoft.com/office/drawing/2014/main" id="{6D0FBBF9-6BF8-1A58-A545-1A84C29FB694}"/>
               </a:ext>
             </a:extLst>
           </p:cNvPr>
@@ -11474,7 +10530,7 @@
           <p:cNvPr id="25" name="Straight Arrow Connector 24">
             <a:extLst>
               <a:ext uri="{FF2B5EF4-FFF2-40B4-BE49-F238E27FC236}">
-                <a16:creationId xmlns:a16="http://schemas.microsoft.com/office/drawing/2014/main" id="{614A14B8-F20B-2E7A-89F0-99EFF5A3FEC2}"/>
+                <a16:creationId xmlns:a16="http://schemas.microsoft.com/office/drawing/2014/main" id="{8F9E6FD1-8714-0EA2-BA75-71FA94676BB5}"/>
               </a:ext>
             </a:extLst>
           </p:cNvPr>
@@ -11516,7 +10572,7 @@
           <p:cNvPr id="27" name="Straight Arrow Connector 26">
             <a:extLst>
               <a:ext uri="{FF2B5EF4-FFF2-40B4-BE49-F238E27FC236}">
-                <a16:creationId xmlns:a16="http://schemas.microsoft.com/office/drawing/2014/main" id="{2AC067E6-23A9-4546-029E-A210D1B2EE8B}"/>
+                <a16:creationId xmlns:a16="http://schemas.microsoft.com/office/drawing/2014/main" id="{50E8C217-7164-4E8F-8B31-D2A586FF7F8C}"/>
               </a:ext>
             </a:extLst>
           </p:cNvPr>
@@ -11529,45 +10585,6 @@
           <a:xfrm>
             <a:off x="6219193" y="5218779"/>
             <a:ext cx="0" cy="295627"/>
-          </a:xfrm>
-          <a:prstGeom prst="straightConnector1">
-            <a:avLst/>
-          </a:prstGeom>
-          <a:ln>
-            <a:tailEnd type="triangle"/>
-          </a:ln>
-        </p:spPr>
-        <p:style>
-          <a:lnRef idx="2">
-            <a:schemeClr val="dk1"/>
-          </a:lnRef>
-          <a:fillRef idx="0">
-            <a:schemeClr val="dk1"/>
-          </a:fillRef>
-          <a:effectRef idx="1">
-            <a:schemeClr val="dk1"/>
-          </a:effectRef>
-          <a:fontRef idx="minor">
-            <a:schemeClr val="tx1"/>
-          </a:fontRef>
-        </p:style>
-      </p:cxnSp>
-      <p:cxnSp>
-        <p:nvCxnSpPr>
-          <p:cNvPr id="28" name="Straight Arrow Connector 27">
-            <a:extLst>
-              <a:ext uri="{FF2B5EF4-FFF2-40B4-BE49-F238E27FC236}">
-                <a16:creationId xmlns:a16="http://schemas.microsoft.com/office/drawing/2014/main" id="{864A6034-A789-8217-EDA3-3756E33D058C}"/>
-              </a:ext>
-            </a:extLst>
-          </p:cNvPr>
-          <p:cNvCxnSpPr/>
-          <p:nvPr/>
-        </p:nvCxnSpPr>
-        <p:spPr>
-          <a:xfrm>
-            <a:off x="4388744" y="4716431"/>
-            <a:ext cx="271924" cy="0"/>
           </a:xfrm>
           <a:prstGeom prst="straightConnector1">
             <a:avLst/>
@@ -11596,7 +10613,7 @@
           <p:cNvPr id="29" name="Straight Arrow Connector 28">
             <a:extLst>
               <a:ext uri="{FF2B5EF4-FFF2-40B4-BE49-F238E27FC236}">
-                <a16:creationId xmlns:a16="http://schemas.microsoft.com/office/drawing/2014/main" id="{81972BFC-D465-E449-55AD-03772B519CD7}"/>
+                <a16:creationId xmlns:a16="http://schemas.microsoft.com/office/drawing/2014/main" id="{EDBEC616-48A2-75F5-05DA-FDB17B0A543F}"/>
               </a:ext>
             </a:extLst>
           </p:cNvPr>
@@ -11634,53 +10651,12 @@
           </a:fontRef>
         </p:style>
       </p:cxnSp>
-      <p:cxnSp>
-        <p:nvCxnSpPr>
-          <p:cNvPr id="32" name="Straight Arrow Connector 31">
-            <a:extLst>
-              <a:ext uri="{FF2B5EF4-FFF2-40B4-BE49-F238E27FC236}">
-                <a16:creationId xmlns:a16="http://schemas.microsoft.com/office/drawing/2014/main" id="{8E21C877-B970-5DA5-8038-8BD21104F242}"/>
-              </a:ext>
-            </a:extLst>
-          </p:cNvPr>
-          <p:cNvCxnSpPr>
-            <a:cxnSpLocks/>
-          </p:cNvCxnSpPr>
-          <p:nvPr/>
-        </p:nvCxnSpPr>
-        <p:spPr>
-          <a:xfrm flipH="1">
-            <a:off x="4401225" y="3427487"/>
-            <a:ext cx="1817968" cy="0"/>
-          </a:xfrm>
-          <a:prstGeom prst="straightConnector1">
-            <a:avLst/>
-          </a:prstGeom>
-          <a:ln>
-            <a:tailEnd type="triangle"/>
-          </a:ln>
-        </p:spPr>
-        <p:style>
-          <a:lnRef idx="2">
-            <a:schemeClr val="dk1"/>
-          </a:lnRef>
-          <a:fillRef idx="0">
-            <a:schemeClr val="dk1"/>
-          </a:fillRef>
-          <a:effectRef idx="1">
-            <a:schemeClr val="dk1"/>
-          </a:effectRef>
-          <a:fontRef idx="minor">
-            <a:schemeClr val="tx1"/>
-          </a:fontRef>
-        </p:style>
-      </p:cxnSp>
       <p:sp>
         <p:nvSpPr>
           <p:cNvPr id="34" name="Rectangle 33">
             <a:extLst>
               <a:ext uri="{FF2B5EF4-FFF2-40B4-BE49-F238E27FC236}">
-                <a16:creationId xmlns:a16="http://schemas.microsoft.com/office/drawing/2014/main" id="{D8FB54F6-1CBD-4467-B620-E2250963750E}"/>
+                <a16:creationId xmlns:a16="http://schemas.microsoft.com/office/drawing/2014/main" id="{6A2480DB-9A57-D9DC-E53F-B4F1DACC8262}"/>
               </a:ext>
             </a:extLst>
           </p:cNvPr>
@@ -11734,7 +10710,7 @@
           <p:cNvPr id="35" name="Straight Arrow Connector 34">
             <a:extLst>
               <a:ext uri="{FF2B5EF4-FFF2-40B4-BE49-F238E27FC236}">
-                <a16:creationId xmlns:a16="http://schemas.microsoft.com/office/drawing/2014/main" id="{AE06F24B-3445-0E98-4821-E06EBD835EA2}"/>
+                <a16:creationId xmlns:a16="http://schemas.microsoft.com/office/drawing/2014/main" id="{F9FB726A-2690-EE56-F9A8-1537C1A4C85E}"/>
               </a:ext>
             </a:extLst>
           </p:cNvPr>
@@ -11775,7 +10751,7 @@
           <p:cNvPr id="50" name="Straight Arrow Connector 49">
             <a:extLst>
               <a:ext uri="{FF2B5EF4-FFF2-40B4-BE49-F238E27FC236}">
-                <a16:creationId xmlns:a16="http://schemas.microsoft.com/office/drawing/2014/main" id="{B4C7AAAE-4449-5229-2A25-6FD430EF9DCC}"/>
+                <a16:creationId xmlns:a16="http://schemas.microsoft.com/office/drawing/2014/main" id="{545D6087-BC22-D0D9-9586-498503A134AA}"/>
               </a:ext>
             </a:extLst>
           </p:cNvPr>
@@ -11817,7 +10793,7 @@
           <p:cNvPr id="51" name="Straight Arrow Connector 50">
             <a:extLst>
               <a:ext uri="{FF2B5EF4-FFF2-40B4-BE49-F238E27FC236}">
-                <a16:creationId xmlns:a16="http://schemas.microsoft.com/office/drawing/2014/main" id="{883374B7-A2EC-5F00-D50A-72A678412DF4}"/>
+                <a16:creationId xmlns:a16="http://schemas.microsoft.com/office/drawing/2014/main" id="{4FECD7D7-60F6-5821-5BDB-27FB849F3C2B}"/>
               </a:ext>
             </a:extLst>
           </p:cNvPr>
@@ -11860,7 +10836,7 @@
           <p:cNvPr id="52" name="Straight Arrow Connector 51">
             <a:extLst>
               <a:ext uri="{FF2B5EF4-FFF2-40B4-BE49-F238E27FC236}">
-                <a16:creationId xmlns:a16="http://schemas.microsoft.com/office/drawing/2014/main" id="{9F822BE3-AF69-B1E1-36ED-0DB9A54CA9CE}"/>
+                <a16:creationId xmlns:a16="http://schemas.microsoft.com/office/drawing/2014/main" id="{60E1A640-D67F-9D83-ED76-67AD87B4C23E}"/>
               </a:ext>
             </a:extLst>
           </p:cNvPr>
@@ -11903,7 +10879,7 @@
           <p:cNvPr id="56" name="Rectangle 55">
             <a:extLst>
               <a:ext uri="{FF2B5EF4-FFF2-40B4-BE49-F238E27FC236}">
-                <a16:creationId xmlns:a16="http://schemas.microsoft.com/office/drawing/2014/main" id="{299C18C4-D301-F711-C32B-95C98DAD8DD9}"/>
+                <a16:creationId xmlns:a16="http://schemas.microsoft.com/office/drawing/2014/main" id="{5967F94C-576A-9AF4-0872-132F083583C0}"/>
               </a:ext>
             </a:extLst>
           </p:cNvPr>
@@ -11955,7 +10931,7 @@
           <p:cNvPr id="57" name="Content Placeholder 3">
             <a:extLst>
               <a:ext uri="{FF2B5EF4-FFF2-40B4-BE49-F238E27FC236}">
-                <a16:creationId xmlns:a16="http://schemas.microsoft.com/office/drawing/2014/main" id="{3EA09210-21C4-48EF-8146-C8FBED4EEC02}"/>
+                <a16:creationId xmlns:a16="http://schemas.microsoft.com/office/drawing/2014/main" id="{EAC3BF6E-1B94-E07E-BFEA-B8C64DC2852C}"/>
               </a:ext>
             </a:extLst>
           </p:cNvPr>
@@ -12197,6 +11173,1642 @@
           <p:cNvPr id="58" name="Rectangle 57">
             <a:extLst>
               <a:ext uri="{FF2B5EF4-FFF2-40B4-BE49-F238E27FC236}">
+                <a16:creationId xmlns:a16="http://schemas.microsoft.com/office/drawing/2014/main" id="{9C385FEA-41EB-B10C-A04A-ADD42A10C4DA}"/>
+              </a:ext>
+            </a:extLst>
+          </p:cNvPr>
+          <p:cNvSpPr/>
+          <p:nvPr/>
+        </p:nvSpPr>
+        <p:spPr>
+          <a:xfrm>
+            <a:off x="8890618" y="805966"/>
+            <a:ext cx="210708" cy="207073"/>
+          </a:xfrm>
+          <a:prstGeom prst="rect">
+            <a:avLst/>
+          </a:prstGeom>
+          <a:solidFill>
+            <a:srgbClr val="655A9F">
+              <a:alpha val="43000"/>
+            </a:srgbClr>
+          </a:solidFill>
+        </p:spPr>
+        <p:style>
+          <a:lnRef idx="2">
+            <a:schemeClr val="dk1"/>
+          </a:lnRef>
+          <a:fillRef idx="1">
+            <a:schemeClr val="lt1"/>
+          </a:fillRef>
+          <a:effectRef idx="0">
+            <a:schemeClr val="dk1"/>
+          </a:effectRef>
+          <a:fontRef idx="minor">
+            <a:schemeClr val="dk1"/>
+          </a:fontRef>
+        </p:style>
+        <p:txBody>
+          <a:bodyPr rtlCol="0" anchor="ctr"/>
+          <a:lstStyle/>
+          <a:p>
+            <a:pPr algn="ctr"/>
+            <a:endParaRPr lang="en-US" dirty="0">
+              <a:latin typeface="Century Gothic" panose="020B0502020202020204" pitchFamily="34" charset="0"/>
+            </a:endParaRPr>
+          </a:p>
+        </p:txBody>
+      </p:sp>
+      <p:sp>
+        <p:nvSpPr>
+          <p:cNvPr id="59" name="Rectangle 58">
+            <a:extLst>
+              <a:ext uri="{FF2B5EF4-FFF2-40B4-BE49-F238E27FC236}">
+                <a16:creationId xmlns:a16="http://schemas.microsoft.com/office/drawing/2014/main" id="{D36A9FD5-E173-56F1-2DBE-D32B48959B8D}"/>
+              </a:ext>
+            </a:extLst>
+          </p:cNvPr>
+          <p:cNvSpPr/>
+          <p:nvPr/>
+        </p:nvSpPr>
+        <p:spPr>
+          <a:xfrm>
+            <a:off x="8890618" y="1156396"/>
+            <a:ext cx="210708" cy="207073"/>
+          </a:xfrm>
+          <a:prstGeom prst="rect">
+            <a:avLst/>
+          </a:prstGeom>
+          <a:solidFill>
+            <a:srgbClr val="FABB00">
+              <a:alpha val="54118"/>
+            </a:srgbClr>
+          </a:solidFill>
+        </p:spPr>
+        <p:style>
+          <a:lnRef idx="2">
+            <a:schemeClr val="dk1"/>
+          </a:lnRef>
+          <a:fillRef idx="1">
+            <a:schemeClr val="lt1"/>
+          </a:fillRef>
+          <a:effectRef idx="0">
+            <a:schemeClr val="dk1"/>
+          </a:effectRef>
+          <a:fontRef idx="minor">
+            <a:schemeClr val="dk1"/>
+          </a:fontRef>
+        </p:style>
+        <p:txBody>
+          <a:bodyPr rtlCol="0" anchor="ctr"/>
+          <a:lstStyle/>
+          <a:p>
+            <a:pPr algn="ctr"/>
+            <a:endParaRPr lang="en-US" dirty="0">
+              <a:latin typeface="Century Gothic" panose="020B0502020202020204" pitchFamily="34" charset="0"/>
+            </a:endParaRPr>
+          </a:p>
+        </p:txBody>
+      </p:sp>
+      <p:sp>
+        <p:nvSpPr>
+          <p:cNvPr id="60" name="Rectangle 59">
+            <a:extLst>
+              <a:ext uri="{FF2B5EF4-FFF2-40B4-BE49-F238E27FC236}">
+                <a16:creationId xmlns:a16="http://schemas.microsoft.com/office/drawing/2014/main" id="{9A25FBBB-1834-9FD5-7A54-E393B677CEEC}"/>
+              </a:ext>
+            </a:extLst>
+          </p:cNvPr>
+          <p:cNvSpPr/>
+          <p:nvPr/>
+        </p:nvSpPr>
+        <p:spPr>
+          <a:xfrm>
+            <a:off x="8890618" y="1502992"/>
+            <a:ext cx="210708" cy="207073"/>
+          </a:xfrm>
+          <a:prstGeom prst="rect">
+            <a:avLst/>
+          </a:prstGeom>
+          <a:solidFill>
+            <a:srgbClr val="E2001A">
+              <a:alpha val="42000"/>
+            </a:srgbClr>
+          </a:solidFill>
+        </p:spPr>
+        <p:style>
+          <a:lnRef idx="2">
+            <a:schemeClr val="dk1"/>
+          </a:lnRef>
+          <a:fillRef idx="1">
+            <a:schemeClr val="lt1"/>
+          </a:fillRef>
+          <a:effectRef idx="0">
+            <a:schemeClr val="dk1"/>
+          </a:effectRef>
+          <a:fontRef idx="minor">
+            <a:schemeClr val="dk1"/>
+          </a:fontRef>
+        </p:style>
+        <p:txBody>
+          <a:bodyPr rtlCol="0" anchor="ctr"/>
+          <a:lstStyle/>
+          <a:p>
+            <a:pPr algn="ctr"/>
+            <a:endParaRPr lang="en-US" dirty="0">
+              <a:latin typeface="Century Gothic" panose="020B0502020202020204" pitchFamily="34" charset="0"/>
+            </a:endParaRPr>
+          </a:p>
+        </p:txBody>
+      </p:sp>
+    </p:spTree>
+    <p:extLst>
+      <p:ext uri="{BB962C8B-B14F-4D97-AF65-F5344CB8AC3E}">
+        <p14:creationId xmlns:p14="http://schemas.microsoft.com/office/powerpoint/2010/main" val="1348204213"/>
+      </p:ext>
+    </p:extLst>
+  </p:cSld>
+  <p:clrMapOvr>
+    <a:masterClrMapping/>
+  </p:clrMapOvr>
+</p:sld>
+</file>
+
+<file path=ppt/slides/slide7.xml><?xml version="1.0" encoding="utf-8"?>
+<p:sld xmlns:a="http://schemas.openxmlformats.org/drawingml/2006/main" xmlns:r="http://schemas.openxmlformats.org/officeDocument/2006/relationships" xmlns:p="http://schemas.openxmlformats.org/presentationml/2006/main">
+  <p:cSld>
+    <p:spTree>
+      <p:nvGrpSpPr>
+        <p:cNvPr id="1" name="">
+          <a:extLst>
+            <a:ext uri="{FF2B5EF4-FFF2-40B4-BE49-F238E27FC236}">
+              <a16:creationId xmlns:a16="http://schemas.microsoft.com/office/drawing/2014/main" id="{532C6D35-4119-E455-876F-E402CE7BE00B}"/>
+            </a:ext>
+          </a:extLst>
+        </p:cNvPr>
+        <p:cNvGrpSpPr/>
+        <p:nvPr/>
+      </p:nvGrpSpPr>
+      <p:grpSpPr>
+        <a:xfrm>
+          <a:off x="0" y="0"/>
+          <a:ext cx="0" cy="0"/>
+          <a:chOff x="0" y="0"/>
+          <a:chExt cx="0" cy="0"/>
+        </a:xfrm>
+      </p:grpSpPr>
+      <p:sp>
+        <p:nvSpPr>
+          <p:cNvPr id="5" name="Rectangle 4">
+            <a:extLst>
+              <a:ext uri="{FF2B5EF4-FFF2-40B4-BE49-F238E27FC236}">
+                <a16:creationId xmlns:a16="http://schemas.microsoft.com/office/drawing/2014/main" id="{D43E09F5-BA74-9A10-BEEB-9E62110BF67B}"/>
+              </a:ext>
+            </a:extLst>
+          </p:cNvPr>
+          <p:cNvSpPr/>
+          <p:nvPr/>
+        </p:nvSpPr>
+        <p:spPr>
+          <a:xfrm>
+            <a:off x="4660669" y="1650804"/>
+            <a:ext cx="3117047" cy="992408"/>
+          </a:xfrm>
+          <a:prstGeom prst="rect">
+            <a:avLst/>
+          </a:prstGeom>
+          <a:solidFill>
+            <a:schemeClr val="accent6">
+              <a:lumMod val="20000"/>
+              <a:lumOff val="80000"/>
+            </a:schemeClr>
+          </a:solidFill>
+        </p:spPr>
+        <p:style>
+          <a:lnRef idx="2">
+            <a:schemeClr val="dk1"/>
+          </a:lnRef>
+          <a:fillRef idx="1">
+            <a:schemeClr val="lt1"/>
+          </a:fillRef>
+          <a:effectRef idx="0">
+            <a:schemeClr val="dk1"/>
+          </a:effectRef>
+          <a:fontRef idx="minor">
+            <a:schemeClr val="dk1"/>
+          </a:fontRef>
+        </p:style>
+        <p:txBody>
+          <a:bodyPr rtlCol="0" anchor="ctr"/>
+          <a:lstStyle/>
+          <a:p>
+            <a:pPr algn="ctr"/>
+            <a:r>
+              <a:rPr lang="en-US" dirty="0">
+                <a:latin typeface="Century Gothic" panose="020B0502020202020204" pitchFamily="34" charset="0"/>
+              </a:rPr>
+              <a:t>Large Language Model</a:t>
+            </a:r>
+          </a:p>
+        </p:txBody>
+      </p:sp>
+      <p:sp>
+        <p:nvSpPr>
+          <p:cNvPr id="7" name="Rectangle 6">
+            <a:extLst>
+              <a:ext uri="{FF2B5EF4-FFF2-40B4-BE49-F238E27FC236}">
+                <a16:creationId xmlns:a16="http://schemas.microsoft.com/office/drawing/2014/main" id="{F1059DBB-199E-E6E4-DB68-E789D61C7AF9}"/>
+              </a:ext>
+            </a:extLst>
+          </p:cNvPr>
+          <p:cNvSpPr/>
+          <p:nvPr/>
+        </p:nvSpPr>
+        <p:spPr>
+          <a:xfrm>
+            <a:off x="4660669" y="362771"/>
+            <a:ext cx="3117047" cy="992408"/>
+          </a:xfrm>
+          <a:prstGeom prst="rect">
+            <a:avLst/>
+          </a:prstGeom>
+          <a:solidFill>
+            <a:schemeClr val="accent6">
+              <a:lumMod val="20000"/>
+              <a:lumOff val="80000"/>
+            </a:schemeClr>
+          </a:solidFill>
+        </p:spPr>
+        <p:style>
+          <a:lnRef idx="2">
+            <a:schemeClr val="dk1"/>
+          </a:lnRef>
+          <a:fillRef idx="1">
+            <a:schemeClr val="lt1"/>
+          </a:fillRef>
+          <a:effectRef idx="0">
+            <a:schemeClr val="dk1"/>
+          </a:effectRef>
+          <a:fontRef idx="minor">
+            <a:schemeClr val="dk1"/>
+          </a:fontRef>
+        </p:style>
+        <p:txBody>
+          <a:bodyPr rtlCol="0" anchor="ctr"/>
+          <a:lstStyle/>
+          <a:p>
+            <a:pPr algn="ctr"/>
+            <a:r>
+              <a:rPr lang="en-US" dirty="0">
+                <a:latin typeface="Century Gothic" panose="020B0502020202020204" pitchFamily="34" charset="0"/>
+              </a:rPr>
+              <a:t>Training Data</a:t>
+            </a:r>
+          </a:p>
+        </p:txBody>
+      </p:sp>
+      <p:sp>
+        <p:nvSpPr>
+          <p:cNvPr id="8" name="Rectangle 7">
+            <a:extLst>
+              <a:ext uri="{FF2B5EF4-FFF2-40B4-BE49-F238E27FC236}">
+                <a16:creationId xmlns:a16="http://schemas.microsoft.com/office/drawing/2014/main" id="{9F2E7D84-0F21-F3B3-29D9-88EF3DB9252D}"/>
+              </a:ext>
+            </a:extLst>
+          </p:cNvPr>
+          <p:cNvSpPr/>
+          <p:nvPr/>
+        </p:nvSpPr>
+        <p:spPr>
+          <a:xfrm>
+            <a:off x="8024677" y="4226373"/>
+            <a:ext cx="3117047" cy="992408"/>
+          </a:xfrm>
+          <a:prstGeom prst="rect">
+            <a:avLst/>
+          </a:prstGeom>
+          <a:solidFill>
+            <a:srgbClr val="FABB00">
+              <a:alpha val="54118"/>
+            </a:srgbClr>
+          </a:solidFill>
+        </p:spPr>
+        <p:style>
+          <a:lnRef idx="2">
+            <a:schemeClr val="dk1"/>
+          </a:lnRef>
+          <a:fillRef idx="1">
+            <a:schemeClr val="lt1"/>
+          </a:fillRef>
+          <a:effectRef idx="0">
+            <a:schemeClr val="dk1"/>
+          </a:effectRef>
+          <a:fontRef idx="minor">
+            <a:schemeClr val="dk1"/>
+          </a:fontRef>
+        </p:style>
+        <p:txBody>
+          <a:bodyPr rtlCol="0" anchor="ctr"/>
+          <a:lstStyle/>
+          <a:p>
+            <a:pPr algn="ctr"/>
+            <a:r>
+              <a:rPr lang="en-US" dirty="0">
+                <a:latin typeface="Century Gothic" panose="020B0502020202020204" pitchFamily="34" charset="0"/>
+              </a:rPr>
+              <a:t>Probe Training Data</a:t>
+            </a:r>
+          </a:p>
+        </p:txBody>
+      </p:sp>
+      <p:sp>
+        <p:nvSpPr>
+          <p:cNvPr id="9" name="Rectangle 8">
+            <a:extLst>
+              <a:ext uri="{FF2B5EF4-FFF2-40B4-BE49-F238E27FC236}">
+                <a16:creationId xmlns:a16="http://schemas.microsoft.com/office/drawing/2014/main" id="{651A86B2-8EED-9905-279A-34B0C8DE3F0E}"/>
+              </a:ext>
+            </a:extLst>
+          </p:cNvPr>
+          <p:cNvSpPr/>
+          <p:nvPr/>
+        </p:nvSpPr>
+        <p:spPr>
+          <a:xfrm>
+            <a:off x="1110268" y="362771"/>
+            <a:ext cx="3278477" cy="992408"/>
+          </a:xfrm>
+          <a:prstGeom prst="rect">
+            <a:avLst/>
+          </a:prstGeom>
+          <a:solidFill>
+            <a:srgbClr val="D9F2D0">
+              <a:alpha val="52941"/>
+            </a:srgbClr>
+          </a:solidFill>
+          <a:ln>
+            <a:prstDash val="dash"/>
+          </a:ln>
+        </p:spPr>
+        <p:style>
+          <a:lnRef idx="2">
+            <a:schemeClr val="dk1"/>
+          </a:lnRef>
+          <a:fillRef idx="1">
+            <a:schemeClr val="lt1"/>
+          </a:fillRef>
+          <a:effectRef idx="0">
+            <a:schemeClr val="dk1"/>
+          </a:effectRef>
+          <a:fontRef idx="minor">
+            <a:schemeClr val="dk1"/>
+          </a:fontRef>
+        </p:style>
+        <p:txBody>
+          <a:bodyPr rtlCol="0" anchor="ctr"/>
+          <a:lstStyle/>
+          <a:p>
+            <a:pPr algn="ctr"/>
+            <a:r>
+              <a:rPr lang="en-US" dirty="0">
+                <a:latin typeface="Century Gothic" panose="020B0502020202020204" pitchFamily="34" charset="0"/>
+              </a:rPr>
+              <a:t>Training Data Bias</a:t>
+            </a:r>
+          </a:p>
+        </p:txBody>
+      </p:sp>
+      <p:sp>
+        <p:nvSpPr>
+          <p:cNvPr id="10" name="Rectangle 9">
+            <a:extLst>
+              <a:ext uri="{FF2B5EF4-FFF2-40B4-BE49-F238E27FC236}">
+                <a16:creationId xmlns:a16="http://schemas.microsoft.com/office/drawing/2014/main" id="{F7A9C98A-EFC6-9C14-6097-C8465EF91B36}"/>
+              </a:ext>
+            </a:extLst>
+          </p:cNvPr>
+          <p:cNvSpPr/>
+          <p:nvPr/>
+        </p:nvSpPr>
+        <p:spPr>
+          <a:xfrm>
+            <a:off x="1110268" y="1650804"/>
+            <a:ext cx="3278477" cy="992408"/>
+          </a:xfrm>
+          <a:prstGeom prst="rect">
+            <a:avLst/>
+          </a:prstGeom>
+          <a:solidFill>
+            <a:srgbClr val="D9F2D0">
+              <a:alpha val="52941"/>
+            </a:srgbClr>
+          </a:solidFill>
+          <a:ln>
+            <a:prstDash val="dash"/>
+          </a:ln>
+        </p:spPr>
+        <p:style>
+          <a:lnRef idx="2">
+            <a:schemeClr val="dk1"/>
+          </a:lnRef>
+          <a:fillRef idx="1">
+            <a:schemeClr val="lt1"/>
+          </a:fillRef>
+          <a:effectRef idx="0">
+            <a:schemeClr val="dk1"/>
+          </a:effectRef>
+          <a:fontRef idx="minor">
+            <a:schemeClr val="dk1"/>
+          </a:fontRef>
+        </p:style>
+        <p:txBody>
+          <a:bodyPr rtlCol="0" anchor="ctr"/>
+          <a:lstStyle/>
+          <a:p>
+            <a:pPr algn="ctr"/>
+            <a:r>
+              <a:rPr lang="en-US" dirty="0">
+                <a:latin typeface="Century Gothic" panose="020B0502020202020204" pitchFamily="34" charset="0"/>
+              </a:rPr>
+              <a:t>LLM Architecture Bias</a:t>
+            </a:r>
+          </a:p>
+        </p:txBody>
+      </p:sp>
+      <p:sp>
+        <p:nvSpPr>
+          <p:cNvPr id="11" name="Rectangle 10">
+            <a:extLst>
+              <a:ext uri="{FF2B5EF4-FFF2-40B4-BE49-F238E27FC236}">
+                <a16:creationId xmlns:a16="http://schemas.microsoft.com/office/drawing/2014/main" id="{BCE5940A-3974-5791-7FE9-9C067BD05AFF}"/>
+              </a:ext>
+            </a:extLst>
+          </p:cNvPr>
+          <p:cNvSpPr/>
+          <p:nvPr/>
+        </p:nvSpPr>
+        <p:spPr>
+          <a:xfrm>
+            <a:off x="8024677" y="2938338"/>
+            <a:ext cx="3117047" cy="992408"/>
+          </a:xfrm>
+          <a:prstGeom prst="rect">
+            <a:avLst/>
+          </a:prstGeom>
+          <a:solidFill>
+            <a:srgbClr val="FABB00">
+              <a:alpha val="23922"/>
+            </a:srgbClr>
+          </a:solidFill>
+          <a:ln>
+            <a:prstDash val="dash"/>
+          </a:ln>
+        </p:spPr>
+        <p:style>
+          <a:lnRef idx="2">
+            <a:schemeClr val="dk1"/>
+          </a:lnRef>
+          <a:fillRef idx="1">
+            <a:schemeClr val="lt1"/>
+          </a:fillRef>
+          <a:effectRef idx="0">
+            <a:schemeClr val="dk1"/>
+          </a:effectRef>
+          <a:fontRef idx="minor">
+            <a:schemeClr val="dk1"/>
+          </a:fontRef>
+        </p:style>
+        <p:txBody>
+          <a:bodyPr rtlCol="0" anchor="ctr"/>
+          <a:lstStyle/>
+          <a:p>
+            <a:pPr algn="ctr"/>
+            <a:r>
+              <a:rPr lang="en-US" dirty="0">
+                <a:latin typeface="Century Gothic" panose="020B0502020202020204" pitchFamily="34" charset="0"/>
+              </a:rPr>
+              <a:t>Corpus Topic Confound</a:t>
+            </a:r>
+          </a:p>
+        </p:txBody>
+      </p:sp>
+      <p:sp>
+        <p:nvSpPr>
+          <p:cNvPr id="12" name="Rectangle 11">
+            <a:extLst>
+              <a:ext uri="{FF2B5EF4-FFF2-40B4-BE49-F238E27FC236}">
+                <a16:creationId xmlns:a16="http://schemas.microsoft.com/office/drawing/2014/main" id="{A3E08648-E8F8-885B-D766-CC39E040E1C9}"/>
+              </a:ext>
+            </a:extLst>
+          </p:cNvPr>
+          <p:cNvSpPr/>
+          <p:nvPr/>
+        </p:nvSpPr>
+        <p:spPr>
+          <a:xfrm>
+            <a:off x="4660669" y="4226373"/>
+            <a:ext cx="3117047" cy="992408"/>
+          </a:xfrm>
+          <a:prstGeom prst="rect">
+            <a:avLst/>
+          </a:prstGeom>
+          <a:solidFill>
+            <a:srgbClr val="655A9F">
+              <a:alpha val="43000"/>
+            </a:srgbClr>
+          </a:solidFill>
+        </p:spPr>
+        <p:style>
+          <a:lnRef idx="2">
+            <a:schemeClr val="dk1"/>
+          </a:lnRef>
+          <a:fillRef idx="1">
+            <a:schemeClr val="lt1"/>
+          </a:fillRef>
+          <a:effectRef idx="0">
+            <a:schemeClr val="dk1"/>
+          </a:effectRef>
+          <a:fontRef idx="minor">
+            <a:schemeClr val="dk1"/>
+          </a:fontRef>
+        </p:style>
+        <p:txBody>
+          <a:bodyPr rtlCol="0" anchor="ctr"/>
+          <a:lstStyle/>
+          <a:p>
+            <a:pPr algn="ctr"/>
+            <a:r>
+              <a:rPr lang="en-US" dirty="0">
+                <a:latin typeface="Century Gothic" panose="020B0502020202020204" pitchFamily="34" charset="0"/>
+              </a:rPr>
+              <a:t>Probe</a:t>
+            </a:r>
+          </a:p>
+        </p:txBody>
+      </p:sp>
+      <p:sp>
+        <p:nvSpPr>
+          <p:cNvPr id="13" name="Rectangle 12">
+            <a:extLst>
+              <a:ext uri="{FF2B5EF4-FFF2-40B4-BE49-F238E27FC236}">
+                <a16:creationId xmlns:a16="http://schemas.microsoft.com/office/drawing/2014/main" id="{87CBC2D6-C43A-EBA7-822B-FA3A13B7D80A}"/>
+              </a:ext>
+            </a:extLst>
+          </p:cNvPr>
+          <p:cNvSpPr/>
+          <p:nvPr/>
+        </p:nvSpPr>
+        <p:spPr>
+          <a:xfrm>
+            <a:off x="4660669" y="5514406"/>
+            <a:ext cx="3117047" cy="992408"/>
+          </a:xfrm>
+          <a:prstGeom prst="rect">
+            <a:avLst/>
+          </a:prstGeom>
+          <a:solidFill>
+            <a:srgbClr val="E2001A">
+              <a:alpha val="42000"/>
+            </a:srgbClr>
+          </a:solidFill>
+        </p:spPr>
+        <p:style>
+          <a:lnRef idx="2">
+            <a:schemeClr val="dk1"/>
+          </a:lnRef>
+          <a:fillRef idx="1">
+            <a:schemeClr val="lt1"/>
+          </a:fillRef>
+          <a:effectRef idx="0">
+            <a:schemeClr val="dk1"/>
+          </a:effectRef>
+          <a:fontRef idx="minor">
+            <a:schemeClr val="dk1"/>
+          </a:fontRef>
+        </p:style>
+        <p:txBody>
+          <a:bodyPr rtlCol="0" anchor="ctr"/>
+          <a:lstStyle/>
+          <a:p>
+            <a:pPr algn="ctr"/>
+            <a:r>
+              <a:rPr lang="en-US" dirty="0">
+                <a:latin typeface="Century Gothic" panose="020B0502020202020204" pitchFamily="34" charset="0"/>
+              </a:rPr>
+              <a:t>Prediction Error</a:t>
+            </a:r>
+          </a:p>
+        </p:txBody>
+      </p:sp>
+      <p:sp>
+        <p:nvSpPr>
+          <p:cNvPr id="14" name="Rectangle 13">
+            <a:extLst>
+              <a:ext uri="{FF2B5EF4-FFF2-40B4-BE49-F238E27FC236}">
+                <a16:creationId xmlns:a16="http://schemas.microsoft.com/office/drawing/2014/main" id="{900BC281-E1A0-E034-CF74-9799CECBCB25}"/>
+              </a:ext>
+            </a:extLst>
+          </p:cNvPr>
+          <p:cNvSpPr/>
+          <p:nvPr/>
+        </p:nvSpPr>
+        <p:spPr>
+          <a:xfrm>
+            <a:off x="1110267" y="4226373"/>
+            <a:ext cx="3278477" cy="992408"/>
+          </a:xfrm>
+          <a:prstGeom prst="rect">
+            <a:avLst/>
+          </a:prstGeom>
+          <a:solidFill>
+            <a:srgbClr val="655A9F">
+              <a:alpha val="21747"/>
+            </a:srgbClr>
+          </a:solidFill>
+          <a:ln>
+            <a:prstDash val="dash"/>
+          </a:ln>
+        </p:spPr>
+        <p:style>
+          <a:lnRef idx="2">
+            <a:schemeClr val="dk1"/>
+          </a:lnRef>
+          <a:fillRef idx="1">
+            <a:schemeClr val="lt1"/>
+          </a:fillRef>
+          <a:effectRef idx="0">
+            <a:schemeClr val="dk1"/>
+          </a:effectRef>
+          <a:fontRef idx="minor">
+            <a:schemeClr val="dk1"/>
+          </a:fontRef>
+        </p:style>
+        <p:txBody>
+          <a:bodyPr rtlCol="0" anchor="ctr"/>
+          <a:lstStyle/>
+          <a:p>
+            <a:pPr algn="ctr"/>
+            <a:r>
+              <a:rPr lang="en-US" dirty="0">
+                <a:latin typeface="Century Gothic" panose="020B0502020202020204" pitchFamily="34" charset="0"/>
+              </a:rPr>
+              <a:t>Probe Architecture Bias</a:t>
+            </a:r>
+          </a:p>
+        </p:txBody>
+      </p:sp>
+      <p:sp>
+        <p:nvSpPr>
+          <p:cNvPr id="15" name="Rectangle 14">
+            <a:extLst>
+              <a:ext uri="{FF2B5EF4-FFF2-40B4-BE49-F238E27FC236}">
+                <a16:creationId xmlns:a16="http://schemas.microsoft.com/office/drawing/2014/main" id="{DCA39793-5BAC-8B23-61A7-90038631FBE5}"/>
+              </a:ext>
+            </a:extLst>
+          </p:cNvPr>
+          <p:cNvSpPr/>
+          <p:nvPr/>
+        </p:nvSpPr>
+        <p:spPr>
+          <a:xfrm>
+            <a:off x="1110268" y="2938338"/>
+            <a:ext cx="3278476" cy="992408"/>
+          </a:xfrm>
+          <a:prstGeom prst="rect">
+            <a:avLst/>
+          </a:prstGeom>
+          <a:solidFill>
+            <a:srgbClr val="D9F2D0">
+              <a:alpha val="52941"/>
+            </a:srgbClr>
+          </a:solidFill>
+          <a:ln>
+            <a:prstDash val="dash"/>
+          </a:ln>
+        </p:spPr>
+        <p:style>
+          <a:lnRef idx="2">
+            <a:schemeClr val="dk1"/>
+          </a:lnRef>
+          <a:fillRef idx="1">
+            <a:schemeClr val="lt1"/>
+          </a:fillRef>
+          <a:effectRef idx="0">
+            <a:schemeClr val="dk1"/>
+          </a:effectRef>
+          <a:fontRef idx="minor">
+            <a:schemeClr val="dk1"/>
+          </a:fontRef>
+        </p:style>
+        <p:txBody>
+          <a:bodyPr rtlCol="0" anchor="ctr"/>
+          <a:lstStyle/>
+          <a:p>
+            <a:pPr algn="ctr"/>
+            <a:r>
+              <a:rPr lang="en-US" dirty="0">
+                <a:latin typeface="Century Gothic" panose="020B0502020202020204" pitchFamily="34" charset="0"/>
+              </a:rPr>
+              <a:t>LLM Bias</a:t>
+            </a:r>
+          </a:p>
+        </p:txBody>
+      </p:sp>
+      <p:cxnSp>
+        <p:nvCxnSpPr>
+          <p:cNvPr id="17" name="Straight Arrow Connector 16">
+            <a:extLst>
+              <a:ext uri="{FF2B5EF4-FFF2-40B4-BE49-F238E27FC236}">
+                <a16:creationId xmlns:a16="http://schemas.microsoft.com/office/drawing/2014/main" id="{541444C9-6EB6-7AC4-B167-02B02F7CAC62}"/>
+              </a:ext>
+            </a:extLst>
+          </p:cNvPr>
+          <p:cNvCxnSpPr>
+            <a:stCxn id="9" idx="3"/>
+            <a:endCxn id="7" idx="1"/>
+          </p:cNvCxnSpPr>
+          <p:nvPr/>
+        </p:nvCxnSpPr>
+        <p:spPr>
+          <a:xfrm>
+            <a:off x="4388746" y="858976"/>
+            <a:ext cx="271924" cy="0"/>
+          </a:xfrm>
+          <a:prstGeom prst="straightConnector1">
+            <a:avLst/>
+          </a:prstGeom>
+          <a:ln>
+            <a:tailEnd type="triangle"/>
+          </a:ln>
+        </p:spPr>
+        <p:style>
+          <a:lnRef idx="2">
+            <a:schemeClr val="dk1"/>
+          </a:lnRef>
+          <a:fillRef idx="0">
+            <a:schemeClr val="dk1"/>
+          </a:fillRef>
+          <a:effectRef idx="1">
+            <a:schemeClr val="dk1"/>
+          </a:effectRef>
+          <a:fontRef idx="minor">
+            <a:schemeClr val="tx1"/>
+          </a:fontRef>
+        </p:style>
+      </p:cxnSp>
+      <p:cxnSp>
+        <p:nvCxnSpPr>
+          <p:cNvPr id="18" name="Straight Arrow Connector 17">
+            <a:extLst>
+              <a:ext uri="{FF2B5EF4-FFF2-40B4-BE49-F238E27FC236}">
+                <a16:creationId xmlns:a16="http://schemas.microsoft.com/office/drawing/2014/main" id="{DA757E2F-0B97-275F-C103-B1F47CACFEB9}"/>
+              </a:ext>
+            </a:extLst>
+          </p:cNvPr>
+          <p:cNvCxnSpPr>
+            <a:cxnSpLocks/>
+            <a:stCxn id="7" idx="2"/>
+            <a:endCxn id="5" idx="0"/>
+          </p:cNvCxnSpPr>
+          <p:nvPr/>
+        </p:nvCxnSpPr>
+        <p:spPr>
+          <a:xfrm>
+            <a:off x="6219193" y="1355179"/>
+            <a:ext cx="0" cy="295626"/>
+          </a:xfrm>
+          <a:prstGeom prst="straightConnector1">
+            <a:avLst/>
+          </a:prstGeom>
+          <a:ln>
+            <a:tailEnd type="triangle"/>
+          </a:ln>
+        </p:spPr>
+        <p:style>
+          <a:lnRef idx="2">
+            <a:schemeClr val="dk1"/>
+          </a:lnRef>
+          <a:fillRef idx="0">
+            <a:schemeClr val="dk1"/>
+          </a:fillRef>
+          <a:effectRef idx="1">
+            <a:schemeClr val="dk1"/>
+          </a:effectRef>
+          <a:fontRef idx="minor">
+            <a:schemeClr val="tx1"/>
+          </a:fontRef>
+        </p:style>
+      </p:cxnSp>
+      <p:cxnSp>
+        <p:nvCxnSpPr>
+          <p:cNvPr id="21" name="Straight Arrow Connector 20">
+            <a:extLst>
+              <a:ext uri="{FF2B5EF4-FFF2-40B4-BE49-F238E27FC236}">
+                <a16:creationId xmlns:a16="http://schemas.microsoft.com/office/drawing/2014/main" id="{A5FC008F-D319-4876-A03B-BE5E894EF704}"/>
+              </a:ext>
+            </a:extLst>
+          </p:cNvPr>
+          <p:cNvCxnSpPr>
+            <a:cxnSpLocks/>
+            <a:stCxn id="5" idx="2"/>
+            <a:endCxn id="12" idx="0"/>
+          </p:cNvCxnSpPr>
+          <p:nvPr/>
+        </p:nvCxnSpPr>
+        <p:spPr>
+          <a:xfrm>
+            <a:off x="6219193" y="2643212"/>
+            <a:ext cx="0" cy="1583161"/>
+          </a:xfrm>
+          <a:prstGeom prst="straightConnector1">
+            <a:avLst/>
+          </a:prstGeom>
+          <a:ln>
+            <a:tailEnd type="triangle"/>
+          </a:ln>
+        </p:spPr>
+        <p:style>
+          <a:lnRef idx="2">
+            <a:schemeClr val="dk1"/>
+          </a:lnRef>
+          <a:fillRef idx="0">
+            <a:schemeClr val="dk1"/>
+          </a:fillRef>
+          <a:effectRef idx="1">
+            <a:schemeClr val="dk1"/>
+          </a:effectRef>
+          <a:fontRef idx="minor">
+            <a:schemeClr val="tx1"/>
+          </a:fontRef>
+        </p:style>
+      </p:cxnSp>
+      <p:cxnSp>
+        <p:nvCxnSpPr>
+          <p:cNvPr id="24" name="Straight Arrow Connector 23">
+            <a:extLst>
+              <a:ext uri="{FF2B5EF4-FFF2-40B4-BE49-F238E27FC236}">
+                <a16:creationId xmlns:a16="http://schemas.microsoft.com/office/drawing/2014/main" id="{5F53F4A7-2B3B-6CED-C286-1AF47AD66587}"/>
+              </a:ext>
+            </a:extLst>
+          </p:cNvPr>
+          <p:cNvCxnSpPr/>
+          <p:nvPr/>
+        </p:nvCxnSpPr>
+        <p:spPr>
+          <a:xfrm>
+            <a:off x="4388746" y="2166395"/>
+            <a:ext cx="271924" cy="0"/>
+          </a:xfrm>
+          <a:prstGeom prst="straightConnector1">
+            <a:avLst/>
+          </a:prstGeom>
+          <a:ln>
+            <a:tailEnd type="triangle"/>
+          </a:ln>
+        </p:spPr>
+        <p:style>
+          <a:lnRef idx="2">
+            <a:schemeClr val="dk1"/>
+          </a:lnRef>
+          <a:fillRef idx="0">
+            <a:schemeClr val="dk1"/>
+          </a:fillRef>
+          <a:effectRef idx="1">
+            <a:schemeClr val="dk1"/>
+          </a:effectRef>
+          <a:fontRef idx="minor">
+            <a:schemeClr val="tx1"/>
+          </a:fontRef>
+        </p:style>
+      </p:cxnSp>
+      <p:cxnSp>
+        <p:nvCxnSpPr>
+          <p:cNvPr id="25" name="Straight Arrow Connector 24">
+            <a:extLst>
+              <a:ext uri="{FF2B5EF4-FFF2-40B4-BE49-F238E27FC236}">
+                <a16:creationId xmlns:a16="http://schemas.microsoft.com/office/drawing/2014/main" id="{614A14B8-F20B-2E7A-89F0-99EFF5A3FEC2}"/>
+              </a:ext>
+            </a:extLst>
+          </p:cNvPr>
+          <p:cNvCxnSpPr>
+            <a:cxnSpLocks/>
+            <a:stCxn id="11" idx="2"/>
+          </p:cNvCxnSpPr>
+          <p:nvPr/>
+        </p:nvCxnSpPr>
+        <p:spPr>
+          <a:xfrm>
+            <a:off x="9583201" y="3930746"/>
+            <a:ext cx="0" cy="295627"/>
+          </a:xfrm>
+          <a:prstGeom prst="straightConnector1">
+            <a:avLst/>
+          </a:prstGeom>
+          <a:ln>
+            <a:tailEnd type="triangle"/>
+          </a:ln>
+        </p:spPr>
+        <p:style>
+          <a:lnRef idx="2">
+            <a:schemeClr val="dk1"/>
+          </a:lnRef>
+          <a:fillRef idx="0">
+            <a:schemeClr val="dk1"/>
+          </a:fillRef>
+          <a:effectRef idx="1">
+            <a:schemeClr val="dk1"/>
+          </a:effectRef>
+          <a:fontRef idx="minor">
+            <a:schemeClr val="tx1"/>
+          </a:fontRef>
+        </p:style>
+      </p:cxnSp>
+      <p:cxnSp>
+        <p:nvCxnSpPr>
+          <p:cNvPr id="27" name="Straight Arrow Connector 26">
+            <a:extLst>
+              <a:ext uri="{FF2B5EF4-FFF2-40B4-BE49-F238E27FC236}">
+                <a16:creationId xmlns:a16="http://schemas.microsoft.com/office/drawing/2014/main" id="{2AC067E6-23A9-4546-029E-A210D1B2EE8B}"/>
+              </a:ext>
+            </a:extLst>
+          </p:cNvPr>
+          <p:cNvCxnSpPr>
+            <a:cxnSpLocks/>
+          </p:cNvCxnSpPr>
+          <p:nvPr/>
+        </p:nvCxnSpPr>
+        <p:spPr>
+          <a:xfrm>
+            <a:off x="6219193" y="5218779"/>
+            <a:ext cx="0" cy="295627"/>
+          </a:xfrm>
+          <a:prstGeom prst="straightConnector1">
+            <a:avLst/>
+          </a:prstGeom>
+          <a:ln>
+            <a:tailEnd type="triangle"/>
+          </a:ln>
+        </p:spPr>
+        <p:style>
+          <a:lnRef idx="2">
+            <a:schemeClr val="dk1"/>
+          </a:lnRef>
+          <a:fillRef idx="0">
+            <a:schemeClr val="dk1"/>
+          </a:fillRef>
+          <a:effectRef idx="1">
+            <a:schemeClr val="dk1"/>
+          </a:effectRef>
+          <a:fontRef idx="minor">
+            <a:schemeClr val="tx1"/>
+          </a:fontRef>
+        </p:style>
+      </p:cxnSp>
+      <p:cxnSp>
+        <p:nvCxnSpPr>
+          <p:cNvPr id="28" name="Straight Arrow Connector 27">
+            <a:extLst>
+              <a:ext uri="{FF2B5EF4-FFF2-40B4-BE49-F238E27FC236}">
+                <a16:creationId xmlns:a16="http://schemas.microsoft.com/office/drawing/2014/main" id="{864A6034-A789-8217-EDA3-3756E33D058C}"/>
+              </a:ext>
+            </a:extLst>
+          </p:cNvPr>
+          <p:cNvCxnSpPr/>
+          <p:nvPr/>
+        </p:nvCxnSpPr>
+        <p:spPr>
+          <a:xfrm>
+            <a:off x="4388744" y="4716431"/>
+            <a:ext cx="271924" cy="0"/>
+          </a:xfrm>
+          <a:prstGeom prst="straightConnector1">
+            <a:avLst/>
+          </a:prstGeom>
+          <a:ln>
+            <a:tailEnd type="triangle"/>
+          </a:ln>
+        </p:spPr>
+        <p:style>
+          <a:lnRef idx="2">
+            <a:schemeClr val="dk1"/>
+          </a:lnRef>
+          <a:fillRef idx="0">
+            <a:schemeClr val="dk1"/>
+          </a:fillRef>
+          <a:effectRef idx="1">
+            <a:schemeClr val="dk1"/>
+          </a:effectRef>
+          <a:fontRef idx="minor">
+            <a:schemeClr val="tx1"/>
+          </a:fontRef>
+        </p:style>
+      </p:cxnSp>
+      <p:cxnSp>
+        <p:nvCxnSpPr>
+          <p:cNvPr id="29" name="Straight Arrow Connector 28">
+            <a:extLst>
+              <a:ext uri="{FF2B5EF4-FFF2-40B4-BE49-F238E27FC236}">
+                <a16:creationId xmlns:a16="http://schemas.microsoft.com/office/drawing/2014/main" id="{81972BFC-D465-E449-55AD-03772B519CD7}"/>
+              </a:ext>
+            </a:extLst>
+          </p:cNvPr>
+          <p:cNvCxnSpPr>
+            <a:cxnSpLocks/>
+            <a:stCxn id="8" idx="1"/>
+            <a:endCxn id="12" idx="3"/>
+          </p:cNvCxnSpPr>
+          <p:nvPr/>
+        </p:nvCxnSpPr>
+        <p:spPr>
+          <a:xfrm flipH="1">
+            <a:off x="7777716" y="4722577"/>
+            <a:ext cx="246961" cy="0"/>
+          </a:xfrm>
+          <a:prstGeom prst="straightConnector1">
+            <a:avLst/>
+          </a:prstGeom>
+          <a:ln>
+            <a:tailEnd type="triangle"/>
+          </a:ln>
+        </p:spPr>
+        <p:style>
+          <a:lnRef idx="2">
+            <a:schemeClr val="dk1"/>
+          </a:lnRef>
+          <a:fillRef idx="0">
+            <a:schemeClr val="dk1"/>
+          </a:fillRef>
+          <a:effectRef idx="1">
+            <a:schemeClr val="dk1"/>
+          </a:effectRef>
+          <a:fontRef idx="minor">
+            <a:schemeClr val="tx1"/>
+          </a:fontRef>
+        </p:style>
+      </p:cxnSp>
+      <p:cxnSp>
+        <p:nvCxnSpPr>
+          <p:cNvPr id="32" name="Straight Arrow Connector 31">
+            <a:extLst>
+              <a:ext uri="{FF2B5EF4-FFF2-40B4-BE49-F238E27FC236}">
+                <a16:creationId xmlns:a16="http://schemas.microsoft.com/office/drawing/2014/main" id="{8E21C877-B970-5DA5-8038-8BD21104F242}"/>
+              </a:ext>
+            </a:extLst>
+          </p:cNvPr>
+          <p:cNvCxnSpPr>
+            <a:cxnSpLocks/>
+          </p:cNvCxnSpPr>
+          <p:nvPr/>
+        </p:nvCxnSpPr>
+        <p:spPr>
+          <a:xfrm flipH="1">
+            <a:off x="4401225" y="3427487"/>
+            <a:ext cx="1817968" cy="0"/>
+          </a:xfrm>
+          <a:prstGeom prst="straightConnector1">
+            <a:avLst/>
+          </a:prstGeom>
+          <a:ln>
+            <a:tailEnd type="triangle"/>
+          </a:ln>
+        </p:spPr>
+        <p:style>
+          <a:lnRef idx="2">
+            <a:schemeClr val="dk1"/>
+          </a:lnRef>
+          <a:fillRef idx="0">
+            <a:schemeClr val="dk1"/>
+          </a:fillRef>
+          <a:effectRef idx="1">
+            <a:schemeClr val="dk1"/>
+          </a:effectRef>
+          <a:fontRef idx="minor">
+            <a:schemeClr val="tx1"/>
+          </a:fontRef>
+        </p:style>
+      </p:cxnSp>
+      <p:sp>
+        <p:nvSpPr>
+          <p:cNvPr id="34" name="Rectangle 33">
+            <a:extLst>
+              <a:ext uri="{FF2B5EF4-FFF2-40B4-BE49-F238E27FC236}">
+                <a16:creationId xmlns:a16="http://schemas.microsoft.com/office/drawing/2014/main" id="{D8FB54F6-1CBD-4467-B620-E2250963750E}"/>
+              </a:ext>
+            </a:extLst>
+          </p:cNvPr>
+          <p:cNvSpPr/>
+          <p:nvPr/>
+        </p:nvSpPr>
+        <p:spPr>
+          <a:xfrm>
+            <a:off x="8024677" y="5514406"/>
+            <a:ext cx="3117047" cy="992408"/>
+          </a:xfrm>
+          <a:prstGeom prst="rect">
+            <a:avLst/>
+          </a:prstGeom>
+          <a:solidFill>
+            <a:srgbClr val="FABB00">
+              <a:alpha val="54118"/>
+            </a:srgbClr>
+          </a:solidFill>
+        </p:spPr>
+        <p:style>
+          <a:lnRef idx="2">
+            <a:schemeClr val="dk1"/>
+          </a:lnRef>
+          <a:fillRef idx="1">
+            <a:schemeClr val="lt1"/>
+          </a:fillRef>
+          <a:effectRef idx="0">
+            <a:schemeClr val="dk1"/>
+          </a:effectRef>
+          <a:fontRef idx="minor">
+            <a:schemeClr val="dk1"/>
+          </a:fontRef>
+        </p:style>
+        <p:txBody>
+          <a:bodyPr rtlCol="0" anchor="ctr"/>
+          <a:lstStyle/>
+          <a:p>
+            <a:pPr algn="ctr"/>
+            <a:r>
+              <a:rPr lang="en-US" dirty="0">
+                <a:latin typeface="Century Gothic" panose="020B0502020202020204" pitchFamily="34" charset="0"/>
+              </a:rPr>
+              <a:t>Probe Test Data</a:t>
+            </a:r>
+          </a:p>
+        </p:txBody>
+      </p:sp>
+      <p:cxnSp>
+        <p:nvCxnSpPr>
+          <p:cNvPr id="35" name="Straight Arrow Connector 34">
+            <a:extLst>
+              <a:ext uri="{FF2B5EF4-FFF2-40B4-BE49-F238E27FC236}">
+                <a16:creationId xmlns:a16="http://schemas.microsoft.com/office/drawing/2014/main" id="{AE06F24B-3445-0E98-4821-E06EBD835EA2}"/>
+              </a:ext>
+            </a:extLst>
+          </p:cNvPr>
+          <p:cNvCxnSpPr>
+            <a:cxnSpLocks/>
+          </p:cNvCxnSpPr>
+          <p:nvPr/>
+        </p:nvCxnSpPr>
+        <p:spPr>
+          <a:xfrm flipH="1">
+            <a:off x="7777716" y="6010609"/>
+            <a:ext cx="246961" cy="0"/>
+          </a:xfrm>
+          <a:prstGeom prst="straightConnector1">
+            <a:avLst/>
+          </a:prstGeom>
+          <a:ln>
+            <a:tailEnd type="triangle"/>
+          </a:ln>
+        </p:spPr>
+        <p:style>
+          <a:lnRef idx="2">
+            <a:schemeClr val="dk1"/>
+          </a:lnRef>
+          <a:fillRef idx="0">
+            <a:schemeClr val="dk1"/>
+          </a:fillRef>
+          <a:effectRef idx="1">
+            <a:schemeClr val="dk1"/>
+          </a:effectRef>
+          <a:fontRef idx="minor">
+            <a:schemeClr val="tx1"/>
+          </a:fontRef>
+        </p:style>
+      </p:cxnSp>
+      <p:cxnSp>
+        <p:nvCxnSpPr>
+          <p:cNvPr id="50" name="Straight Arrow Connector 49">
+            <a:extLst>
+              <a:ext uri="{FF2B5EF4-FFF2-40B4-BE49-F238E27FC236}">
+                <a16:creationId xmlns:a16="http://schemas.microsoft.com/office/drawing/2014/main" id="{B4C7AAAE-4449-5229-2A25-6FD430EF9DCC}"/>
+              </a:ext>
+            </a:extLst>
+          </p:cNvPr>
+          <p:cNvCxnSpPr>
+            <a:cxnSpLocks/>
+          </p:cNvCxnSpPr>
+          <p:nvPr/>
+        </p:nvCxnSpPr>
+        <p:spPr>
+          <a:xfrm flipH="1">
+            <a:off x="11141724" y="6010609"/>
+            <a:ext cx="246961" cy="0"/>
+          </a:xfrm>
+          <a:prstGeom prst="straightConnector1">
+            <a:avLst/>
+          </a:prstGeom>
+          <a:ln>
+            <a:prstDash val="sysDot"/>
+            <a:tailEnd type="triangle"/>
+          </a:ln>
+        </p:spPr>
+        <p:style>
+          <a:lnRef idx="2">
+            <a:schemeClr val="dk1"/>
+          </a:lnRef>
+          <a:fillRef idx="0">
+            <a:schemeClr val="dk1"/>
+          </a:fillRef>
+          <a:effectRef idx="1">
+            <a:schemeClr val="dk1"/>
+          </a:effectRef>
+          <a:fontRef idx="minor">
+            <a:schemeClr val="tx1"/>
+          </a:fontRef>
+        </p:style>
+      </p:cxnSp>
+      <p:cxnSp>
+        <p:nvCxnSpPr>
+          <p:cNvPr id="51" name="Straight Arrow Connector 50">
+            <a:extLst>
+              <a:ext uri="{FF2B5EF4-FFF2-40B4-BE49-F238E27FC236}">
+                <a16:creationId xmlns:a16="http://schemas.microsoft.com/office/drawing/2014/main" id="{883374B7-A2EC-5F00-D50A-72A678412DF4}"/>
+              </a:ext>
+            </a:extLst>
+          </p:cNvPr>
+          <p:cNvCxnSpPr>
+            <a:cxnSpLocks/>
+          </p:cNvCxnSpPr>
+          <p:nvPr/>
+        </p:nvCxnSpPr>
+        <p:spPr>
+          <a:xfrm flipH="1">
+            <a:off x="11141724" y="3427487"/>
+            <a:ext cx="246961" cy="0"/>
+          </a:xfrm>
+          <a:prstGeom prst="straightConnector1">
+            <a:avLst/>
+          </a:prstGeom>
+          <a:ln>
+            <a:prstDash val="sysDot"/>
+            <a:headEnd type="none" w="med" len="med"/>
+            <a:tailEnd type="none" w="med" len="med"/>
+          </a:ln>
+        </p:spPr>
+        <p:style>
+          <a:lnRef idx="2">
+            <a:schemeClr val="dk1"/>
+          </a:lnRef>
+          <a:fillRef idx="0">
+            <a:schemeClr val="dk1"/>
+          </a:fillRef>
+          <a:effectRef idx="1">
+            <a:schemeClr val="dk1"/>
+          </a:effectRef>
+          <a:fontRef idx="minor">
+            <a:schemeClr val="tx1"/>
+          </a:fontRef>
+        </p:style>
+      </p:cxnSp>
+      <p:cxnSp>
+        <p:nvCxnSpPr>
+          <p:cNvPr id="52" name="Straight Arrow Connector 51">
+            <a:extLst>
+              <a:ext uri="{FF2B5EF4-FFF2-40B4-BE49-F238E27FC236}">
+                <a16:creationId xmlns:a16="http://schemas.microsoft.com/office/drawing/2014/main" id="{9F822BE3-AF69-B1E1-36ED-0DB9A54CA9CE}"/>
+              </a:ext>
+            </a:extLst>
+          </p:cNvPr>
+          <p:cNvCxnSpPr>
+            <a:cxnSpLocks/>
+          </p:cNvCxnSpPr>
+          <p:nvPr/>
+        </p:nvCxnSpPr>
+        <p:spPr>
+          <a:xfrm>
+            <a:off x="11420458" y="3427487"/>
+            <a:ext cx="0" cy="2583122"/>
+          </a:xfrm>
+          <a:prstGeom prst="straightConnector1">
+            <a:avLst/>
+          </a:prstGeom>
+          <a:ln>
+            <a:prstDash val="sysDot"/>
+            <a:headEnd type="none" w="med" len="med"/>
+            <a:tailEnd type="none" w="med" len="med"/>
+          </a:ln>
+        </p:spPr>
+        <p:style>
+          <a:lnRef idx="2">
+            <a:schemeClr val="dk1"/>
+          </a:lnRef>
+          <a:fillRef idx="0">
+            <a:schemeClr val="dk1"/>
+          </a:fillRef>
+          <a:effectRef idx="1">
+            <a:schemeClr val="dk1"/>
+          </a:effectRef>
+          <a:fontRef idx="minor">
+            <a:schemeClr val="tx1"/>
+          </a:fontRef>
+        </p:style>
+      </p:cxnSp>
+      <p:sp>
+        <p:nvSpPr>
+          <p:cNvPr id="56" name="Rectangle 55">
+            <a:extLst>
+              <a:ext uri="{FF2B5EF4-FFF2-40B4-BE49-F238E27FC236}">
+                <a16:creationId xmlns:a16="http://schemas.microsoft.com/office/drawing/2014/main" id="{299C18C4-D301-F711-C32B-95C98DAD8DD9}"/>
+              </a:ext>
+            </a:extLst>
+          </p:cNvPr>
+          <p:cNvSpPr/>
+          <p:nvPr/>
+        </p:nvSpPr>
+        <p:spPr>
+          <a:xfrm>
+            <a:off x="8890618" y="455536"/>
+            <a:ext cx="210708" cy="207073"/>
+          </a:xfrm>
+          <a:prstGeom prst="rect">
+            <a:avLst/>
+          </a:prstGeom>
+          <a:solidFill>
+            <a:schemeClr val="accent6">
+              <a:lumMod val="20000"/>
+              <a:lumOff val="80000"/>
+            </a:schemeClr>
+          </a:solidFill>
+        </p:spPr>
+        <p:style>
+          <a:lnRef idx="2">
+            <a:schemeClr val="dk1"/>
+          </a:lnRef>
+          <a:fillRef idx="1">
+            <a:schemeClr val="lt1"/>
+          </a:fillRef>
+          <a:effectRef idx="0">
+            <a:schemeClr val="dk1"/>
+          </a:effectRef>
+          <a:fontRef idx="minor">
+            <a:schemeClr val="dk1"/>
+          </a:fontRef>
+        </p:style>
+        <p:txBody>
+          <a:bodyPr rtlCol="0" anchor="ctr"/>
+          <a:lstStyle/>
+          <a:p>
+            <a:pPr algn="ctr"/>
+            <a:endParaRPr lang="en-US" dirty="0">
+              <a:latin typeface="Century Gothic" panose="020B0502020202020204" pitchFamily="34" charset="0"/>
+            </a:endParaRPr>
+          </a:p>
+        </p:txBody>
+      </p:sp>
+      <p:sp>
+        <p:nvSpPr>
+          <p:cNvPr id="57" name="Content Placeholder 3">
+            <a:extLst>
+              <a:ext uri="{FF2B5EF4-FFF2-40B4-BE49-F238E27FC236}">
+                <a16:creationId xmlns:a16="http://schemas.microsoft.com/office/drawing/2014/main" id="{3EA09210-21C4-48EF-8146-C8FBED4EEC02}"/>
+              </a:ext>
+            </a:extLst>
+          </p:cNvPr>
+          <p:cNvSpPr txBox="1">
+            <a:spLocks/>
+          </p:cNvSpPr>
+          <p:nvPr/>
+        </p:nvSpPr>
+        <p:spPr>
+          <a:xfrm>
+            <a:off x="9101326" y="425531"/>
+            <a:ext cx="3054625" cy="1363450"/>
+          </a:xfrm>
+          <a:prstGeom prst="rect">
+            <a:avLst/>
+          </a:prstGeom>
+          <a:noFill/>
+        </p:spPr>
+        <p:txBody>
+          <a:bodyPr vert="horz" wrap="square" lIns="91440" tIns="45720" rIns="91440" bIns="45720" rtlCol="0">
+            <a:spAutoFit/>
+          </a:bodyPr>
+          <a:lstStyle>
+            <a:lvl1pPr marL="228600" indent="-228600" algn="l" defTabSz="914400" rtl="0" eaLnBrk="1" latinLnBrk="0" hangingPunct="1">
+              <a:lnSpc>
+                <a:spcPct val="90000"/>
+              </a:lnSpc>
+              <a:spcBef>
+                <a:spcPts val="1000"/>
+              </a:spcBef>
+              <a:buFont typeface="Arial" panose="020B0604020202020204" pitchFamily="34" charset="0"/>
+              <a:buChar char="•"/>
+              <a:defRPr sz="2800" kern="1200">
+                <a:solidFill>
+                  <a:schemeClr val="tx1"/>
+                </a:solidFill>
+                <a:latin typeface="+mn-lt"/>
+                <a:ea typeface="+mn-ea"/>
+                <a:cs typeface="+mn-cs"/>
+              </a:defRPr>
+            </a:lvl1pPr>
+            <a:lvl2pPr marL="685800" indent="-228600" algn="l" defTabSz="914400" rtl="0" eaLnBrk="1" latinLnBrk="0" hangingPunct="1">
+              <a:lnSpc>
+                <a:spcPct val="90000"/>
+              </a:lnSpc>
+              <a:spcBef>
+                <a:spcPts val="500"/>
+              </a:spcBef>
+              <a:buFont typeface="Arial" panose="020B0604020202020204" pitchFamily="34" charset="0"/>
+              <a:buChar char="•"/>
+              <a:defRPr sz="2400" kern="1200">
+                <a:solidFill>
+                  <a:schemeClr val="tx1"/>
+                </a:solidFill>
+                <a:latin typeface="+mn-lt"/>
+                <a:ea typeface="+mn-ea"/>
+                <a:cs typeface="+mn-cs"/>
+              </a:defRPr>
+            </a:lvl2pPr>
+            <a:lvl3pPr marL="1143000" indent="-228600" algn="l" defTabSz="914400" rtl="0" eaLnBrk="1" latinLnBrk="0" hangingPunct="1">
+              <a:lnSpc>
+                <a:spcPct val="90000"/>
+              </a:lnSpc>
+              <a:spcBef>
+                <a:spcPts val="500"/>
+              </a:spcBef>
+              <a:buFont typeface="Arial" panose="020B0604020202020204" pitchFamily="34" charset="0"/>
+              <a:buChar char="•"/>
+              <a:defRPr sz="2000" kern="1200">
+                <a:solidFill>
+                  <a:schemeClr val="tx1"/>
+                </a:solidFill>
+                <a:latin typeface="+mn-lt"/>
+                <a:ea typeface="+mn-ea"/>
+                <a:cs typeface="+mn-cs"/>
+              </a:defRPr>
+            </a:lvl3pPr>
+            <a:lvl4pPr marL="1600200" indent="-228600" algn="l" defTabSz="914400" rtl="0" eaLnBrk="1" latinLnBrk="0" hangingPunct="1">
+              <a:lnSpc>
+                <a:spcPct val="90000"/>
+              </a:lnSpc>
+              <a:spcBef>
+                <a:spcPts val="500"/>
+              </a:spcBef>
+              <a:buFont typeface="Arial" panose="020B0604020202020204" pitchFamily="34" charset="0"/>
+              <a:buChar char="•"/>
+              <a:defRPr sz="1800" kern="1200">
+                <a:solidFill>
+                  <a:schemeClr val="tx1"/>
+                </a:solidFill>
+                <a:latin typeface="+mn-lt"/>
+                <a:ea typeface="+mn-ea"/>
+                <a:cs typeface="+mn-cs"/>
+              </a:defRPr>
+            </a:lvl4pPr>
+            <a:lvl5pPr marL="2057400" indent="-228600" algn="l" defTabSz="914400" rtl="0" eaLnBrk="1" latinLnBrk="0" hangingPunct="1">
+              <a:lnSpc>
+                <a:spcPct val="90000"/>
+              </a:lnSpc>
+              <a:spcBef>
+                <a:spcPts val="500"/>
+              </a:spcBef>
+              <a:buFont typeface="Arial" panose="020B0604020202020204" pitchFamily="34" charset="0"/>
+              <a:buChar char="•"/>
+              <a:defRPr sz="1800" kern="1200">
+                <a:solidFill>
+                  <a:schemeClr val="tx1"/>
+                </a:solidFill>
+                <a:latin typeface="+mn-lt"/>
+                <a:ea typeface="+mn-ea"/>
+                <a:cs typeface="+mn-cs"/>
+              </a:defRPr>
+            </a:lvl5pPr>
+            <a:lvl6pPr marL="2514600" indent="-228600" algn="l" defTabSz="914400" rtl="0" eaLnBrk="1" latinLnBrk="0" hangingPunct="1">
+              <a:lnSpc>
+                <a:spcPct val="90000"/>
+              </a:lnSpc>
+              <a:spcBef>
+                <a:spcPts val="500"/>
+              </a:spcBef>
+              <a:buFont typeface="Arial" panose="020B0604020202020204" pitchFamily="34" charset="0"/>
+              <a:buChar char="•"/>
+              <a:defRPr sz="1800" kern="1200">
+                <a:solidFill>
+                  <a:schemeClr val="tx1"/>
+                </a:solidFill>
+                <a:latin typeface="+mn-lt"/>
+                <a:ea typeface="+mn-ea"/>
+                <a:cs typeface="+mn-cs"/>
+              </a:defRPr>
+            </a:lvl6pPr>
+            <a:lvl7pPr marL="2971800" indent="-228600" algn="l" defTabSz="914400" rtl="0" eaLnBrk="1" latinLnBrk="0" hangingPunct="1">
+              <a:lnSpc>
+                <a:spcPct val="90000"/>
+              </a:lnSpc>
+              <a:spcBef>
+                <a:spcPts val="500"/>
+              </a:spcBef>
+              <a:buFont typeface="Arial" panose="020B0604020202020204" pitchFamily="34" charset="0"/>
+              <a:buChar char="•"/>
+              <a:defRPr sz="1800" kern="1200">
+                <a:solidFill>
+                  <a:schemeClr val="tx1"/>
+                </a:solidFill>
+                <a:latin typeface="+mn-lt"/>
+                <a:ea typeface="+mn-ea"/>
+                <a:cs typeface="+mn-cs"/>
+              </a:defRPr>
+            </a:lvl7pPr>
+            <a:lvl8pPr marL="3429000" indent="-228600" algn="l" defTabSz="914400" rtl="0" eaLnBrk="1" latinLnBrk="0" hangingPunct="1">
+              <a:lnSpc>
+                <a:spcPct val="90000"/>
+              </a:lnSpc>
+              <a:spcBef>
+                <a:spcPts val="500"/>
+              </a:spcBef>
+              <a:buFont typeface="Arial" panose="020B0604020202020204" pitchFamily="34" charset="0"/>
+              <a:buChar char="•"/>
+              <a:defRPr sz="1800" kern="1200">
+                <a:solidFill>
+                  <a:schemeClr val="tx1"/>
+                </a:solidFill>
+                <a:latin typeface="+mn-lt"/>
+                <a:ea typeface="+mn-ea"/>
+                <a:cs typeface="+mn-cs"/>
+              </a:defRPr>
+            </a:lvl8pPr>
+            <a:lvl9pPr marL="3886200" indent="-228600" algn="l" defTabSz="914400" rtl="0" eaLnBrk="1" latinLnBrk="0" hangingPunct="1">
+              <a:lnSpc>
+                <a:spcPct val="90000"/>
+              </a:lnSpc>
+              <a:spcBef>
+                <a:spcPts val="500"/>
+              </a:spcBef>
+              <a:buFont typeface="Arial" panose="020B0604020202020204" pitchFamily="34" charset="0"/>
+              <a:buChar char="•"/>
+              <a:defRPr sz="1800" kern="1200">
+                <a:solidFill>
+                  <a:schemeClr val="tx1"/>
+                </a:solidFill>
+                <a:latin typeface="+mn-lt"/>
+                <a:ea typeface="+mn-ea"/>
+                <a:cs typeface="+mn-cs"/>
+              </a:defRPr>
+            </a:lvl9pPr>
+          </a:lstStyle>
+          <a:p>
+            <a:pPr marL="0" indent="0">
+              <a:buFont typeface="Arial" panose="020B0604020202020204" pitchFamily="34" charset="0"/>
+              <a:buNone/>
+            </a:pPr>
+            <a:r>
+              <a:rPr lang="en-US" sz="1600" dirty="0">
+                <a:latin typeface="Century Gothic" panose="020B0502020202020204" pitchFamily="34" charset="0"/>
+              </a:rPr>
+              <a:t>= Large Language Model</a:t>
+            </a:r>
+          </a:p>
+          <a:p>
+            <a:pPr marL="0" indent="0">
+              <a:buFont typeface="Arial" panose="020B0604020202020204" pitchFamily="34" charset="0"/>
+              <a:buNone/>
+            </a:pPr>
+            <a:r>
+              <a:rPr lang="en-US" sz="1600" dirty="0">
+                <a:latin typeface="Century Gothic" panose="020B0502020202020204" pitchFamily="34" charset="0"/>
+              </a:rPr>
+              <a:t>= Probe Architecture</a:t>
+            </a:r>
+          </a:p>
+          <a:p>
+            <a:pPr marL="0" indent="0">
+              <a:buFont typeface="Arial" panose="020B0604020202020204" pitchFamily="34" charset="0"/>
+              <a:buNone/>
+            </a:pPr>
+            <a:r>
+              <a:rPr lang="en-US" sz="1600" dirty="0">
+                <a:latin typeface="Century Gothic" panose="020B0502020202020204" pitchFamily="34" charset="0"/>
+              </a:rPr>
+              <a:t>= Data Distribution</a:t>
+            </a:r>
+          </a:p>
+          <a:p>
+            <a:pPr marL="0" indent="0">
+              <a:buFont typeface="Arial" panose="020B0604020202020204" pitchFamily="34" charset="0"/>
+              <a:buNone/>
+            </a:pPr>
+            <a:r>
+              <a:rPr lang="en-US" sz="1600" dirty="0">
+                <a:latin typeface="Century Gothic" panose="020B0502020202020204" pitchFamily="34" charset="0"/>
+              </a:rPr>
+              <a:t>= All Variables</a:t>
+            </a:r>
+          </a:p>
+        </p:txBody>
+      </p:sp>
+      <p:sp>
+        <p:nvSpPr>
+          <p:cNvPr id="58" name="Rectangle 57">
+            <a:extLst>
+              <a:ext uri="{FF2B5EF4-FFF2-40B4-BE49-F238E27FC236}">
                 <a16:creationId xmlns:a16="http://schemas.microsoft.com/office/drawing/2014/main" id="{DD367EF0-AAA6-3F53-2BA1-370E4A0BE33F}"/>
               </a:ext>
             </a:extLst>
@@ -12436,10 +13048,171 @@
           <a:chExt cx="0" cy="0"/>
         </a:xfrm>
       </p:grpSpPr>
+      <p:pic>
+        <p:nvPicPr>
+          <p:cNvPr id="10" name="Picture 9">
+            <a:extLst>
+              <a:ext uri="{FF2B5EF4-FFF2-40B4-BE49-F238E27FC236}">
+                <a16:creationId xmlns:a16="http://schemas.microsoft.com/office/drawing/2014/main" id="{E2A07D00-82CC-50D0-1B6D-86C89E92F0A8}"/>
+              </a:ext>
+            </a:extLst>
+          </p:cNvPr>
+          <p:cNvPicPr>
+            <a:picLocks noChangeAspect="1"/>
+          </p:cNvPicPr>
+          <p:nvPr/>
+        </p:nvPicPr>
+        <p:blipFill>
+          <a:blip r:embed="rId2"/>
+          <a:srcRect t="7505" r="35920"/>
+          <a:stretch>
+            <a:fillRect/>
+          </a:stretch>
+        </p:blipFill>
+        <p:spPr>
+          <a:xfrm>
+            <a:off x="1952684" y="758015"/>
+            <a:ext cx="6670455" cy="5777008"/>
+          </a:xfrm>
+          <a:prstGeom prst="rect">
+            <a:avLst/>
+          </a:prstGeom>
+        </p:spPr>
+      </p:pic>
+      <p:grpSp>
+        <p:nvGrpSpPr>
+          <p:cNvPr id="11" name="Group 10">
+            <a:extLst>
+              <a:ext uri="{FF2B5EF4-FFF2-40B4-BE49-F238E27FC236}">
+                <a16:creationId xmlns:a16="http://schemas.microsoft.com/office/drawing/2014/main" id="{E8F84CF7-3530-668A-1AA4-FDDE7ACDF66F}"/>
+              </a:ext>
+            </a:extLst>
+          </p:cNvPr>
+          <p:cNvGrpSpPr/>
+          <p:nvPr/>
+        </p:nvGrpSpPr>
+        <p:grpSpPr>
+          <a:xfrm>
+            <a:off x="6003402" y="1186278"/>
+            <a:ext cx="2310420" cy="1728288"/>
+            <a:chOff x="7388029" y="1262358"/>
+            <a:chExt cx="1914722" cy="1432290"/>
+          </a:xfrm>
+        </p:grpSpPr>
+        <p:pic>
+          <p:nvPicPr>
+            <p:cNvPr id="7" name="Picture 6">
+              <a:extLst>
+                <a:ext uri="{FF2B5EF4-FFF2-40B4-BE49-F238E27FC236}">
+                  <a16:creationId xmlns:a16="http://schemas.microsoft.com/office/drawing/2014/main" id="{47B24A4D-0108-5EC7-9D97-220D40E93795}"/>
+                </a:ext>
+              </a:extLst>
+            </p:cNvPr>
+            <p:cNvPicPr>
+              <a:picLocks noChangeAspect="1"/>
+            </p:cNvPicPr>
+            <p:nvPr/>
+          </p:nvPicPr>
+          <p:blipFill>
+            <a:blip r:embed="rId2"/>
+            <a:srcRect l="74628" t="11546" r="736" b="57741"/>
+            <a:stretch>
+              <a:fillRect/>
+            </a:stretch>
+          </p:blipFill>
+          <p:spPr>
+            <a:xfrm>
+              <a:off x="7388029" y="1262358"/>
+              <a:ext cx="1914722" cy="1432290"/>
+            </a:xfrm>
+            <a:prstGeom prst="rect">
+              <a:avLst/>
+            </a:prstGeom>
+          </p:spPr>
+        </p:pic>
+        <p:pic>
+          <p:nvPicPr>
+            <p:cNvPr id="9" name="Picture 8">
+              <a:extLst>
+                <a:ext uri="{FF2B5EF4-FFF2-40B4-BE49-F238E27FC236}">
+                  <a16:creationId xmlns:a16="http://schemas.microsoft.com/office/drawing/2014/main" id="{1D6C4F84-A286-0FAF-DAB1-98565C681F15}"/>
+                </a:ext>
+              </a:extLst>
+            </p:cNvPr>
+            <p:cNvPicPr>
+              <a:picLocks noChangeAspect="1"/>
+            </p:cNvPicPr>
+            <p:nvPr/>
+          </p:nvPicPr>
+          <p:blipFill>
+            <a:blip r:embed="rId3"/>
+            <a:srcRect l="78605" t="16300" r="602" b="58365"/>
+            <a:stretch>
+              <a:fillRect/>
+            </a:stretch>
+          </p:blipFill>
+          <p:spPr>
+            <a:xfrm>
+              <a:off x="7664450" y="1330324"/>
+              <a:ext cx="1638300" cy="1026652"/>
+            </a:xfrm>
+            <a:prstGeom prst="rect">
+              <a:avLst/>
+            </a:prstGeom>
+          </p:spPr>
+        </p:pic>
+      </p:grpSp>
+      <p:sp>
+        <p:nvSpPr>
+          <p:cNvPr id="12" name="TextBox 11">
+            <a:extLst>
+              <a:ext uri="{FF2B5EF4-FFF2-40B4-BE49-F238E27FC236}">
+                <a16:creationId xmlns:a16="http://schemas.microsoft.com/office/drawing/2014/main" id="{DC054E36-0F34-0E3D-E22C-8259B2347FA7}"/>
+              </a:ext>
+            </a:extLst>
+          </p:cNvPr>
+          <p:cNvSpPr txBox="1"/>
+          <p:nvPr/>
+        </p:nvSpPr>
+        <p:spPr>
+          <a:xfrm>
+            <a:off x="1535250" y="660780"/>
+            <a:ext cx="7814080" cy="400110"/>
+          </a:xfrm>
+          <a:prstGeom prst="rect">
+            <a:avLst/>
+          </a:prstGeom>
+          <a:noFill/>
+        </p:spPr>
+        <p:txBody>
+          <a:bodyPr wrap="square" rtlCol="0">
+            <a:spAutoFit/>
+          </a:bodyPr>
+          <a:lstStyle/>
+          <a:p>
+            <a:pPr algn="ctr"/>
+            <a:r>
+              <a:rPr lang="en-US" dirty="0">
+                <a:latin typeface="Century Gothic" panose="020B0502020202020204" pitchFamily="34" charset="0"/>
+              </a:rPr>
+              <a:t>Predictive </a:t>
+            </a:r>
+            <a:r>
+              <a:rPr lang="en-US" sz="2000" dirty="0">
+                <a:latin typeface="Century Gothic" panose="020B0502020202020204" pitchFamily="34" charset="0"/>
+              </a:rPr>
+              <a:t>Accuracy of Probes</a:t>
+            </a:r>
+            <a:endParaRPr lang="en-US" dirty="0">
+              <a:latin typeface="Century Gothic" panose="020B0502020202020204" pitchFamily="34" charset="0"/>
+            </a:endParaRPr>
+          </a:p>
+        </p:txBody>
+      </p:sp>
     </p:spTree>
     <p:extLst>
       <p:ext uri="{BB962C8B-B14F-4D97-AF65-F5344CB8AC3E}">
-        <p14:creationId xmlns:p14="http://schemas.microsoft.com/office/powerpoint/2010/main" val="790906138"/>
+        <p14:creationId xmlns:p14="http://schemas.microsoft.com/office/powerpoint/2010/main" val="2078991236"/>
       </p:ext>
     </p:extLst>
   </p:cSld>
